--- a/output/wordlabs-con-prefix-3day.pptx
+++ b/output/wordlabs-con-prefix-3day.pptx
@@ -4279,7 +4279,7 @@
                 <a:ea typeface="Calibri" pitchFamily="34" charset="-122"/>
                 <a:cs typeface="Calibri" pitchFamily="34" charset="-120"/>
               </a:rPr>
-              <a:t>Origin: Latin: com</a:t>
+              <a:t>Origin: Latin: cum</a:t>
             </a:r>
             <a:endParaRPr lang="en-US" sz="1300" dirty="0"/>
           </a:p>
@@ -6040,7 +6040,7 @@
                 <a:ea typeface="Calibri" pitchFamily="34" charset="-122"/>
                 <a:cs typeface="Calibri" pitchFamily="34" charset="-120"/>
               </a:rPr>
-              <a:t>The engineer helped to </a:t>
+              <a:t>We need to </a:t>
             </a:r>
             <a:pPr algn="l" indent="0" marL="0">
               <a:buNone/>
@@ -6057,7 +6057,7 @@
                 <a:ea typeface="Calibri" pitchFamily="34" charset="-122"/>
                 <a:cs typeface="Calibri" pitchFamily="34" charset="-120"/>
               </a:rPr>
-              <a:t>construct</a:t>
+              <a:t>connect</a:t>
             </a:r>
             <a:pPr algn="l" indent="0" marL="0">
               <a:buNone/>
@@ -6071,7 +6071,7 @@
                 <a:ea typeface="Calibri" pitchFamily="34" charset="-122"/>
                 <a:cs typeface="Calibri" pitchFamily="34" charset="-120"/>
               </a:rPr>
-              <a:t> the bridge and </a:t>
+              <a:t> the cables carefully before we </a:t>
             </a:r>
             <a:pPr algn="l" indent="0" marL="0">
               <a:buNone/>
@@ -6102,7 +6102,7 @@
                 <a:ea typeface="Calibri" pitchFamily="34" charset="-122"/>
                 <a:cs typeface="Calibri" pitchFamily="34" charset="-120"/>
               </a:rPr>
-              <a:t> it was safe.</a:t>
+              <a:t> the machine is ready.</a:t>
             </a:r>
             <a:endParaRPr lang="en-US" sz="1800" dirty="0"/>
           </a:p>
@@ -6257,7 +6257,7 @@
                 <a:ea typeface="Trebuchet MS" pitchFamily="34" charset="-122"/>
                 <a:cs typeface="Trebuchet MS" pitchFamily="34" charset="-120"/>
               </a:rPr>
-              <a:t>construct</a:t>
+              <a:t>connect</a:t>
             </a:r>
             <a:endParaRPr lang="en-US" sz="1400" dirty="0"/>
           </a:p>
@@ -6855,7 +6855,7 @@
                 <a:ea typeface="Trebuchet MS" pitchFamily="34" charset="-122"/>
                 <a:cs typeface="Trebuchet MS" pitchFamily="34" charset="-120"/>
               </a:rPr>
-              <a:t>construct</a:t>
+              <a:t>connect</a:t>
             </a:r>
             <a:endParaRPr lang="en-US" sz="2800" dirty="0"/>
           </a:p>
@@ -7682,7 +7682,7 @@
                 <a:ea typeface="Trebuchet MS" pitchFamily="34" charset="-122"/>
                 <a:cs typeface="Trebuchet MS" pitchFamily="34" charset="-120"/>
               </a:rPr>
-              <a:t>construct</a:t>
+              <a:t>connect</a:t>
             </a:r>
             <a:endParaRPr lang="en-US" sz="2800" dirty="0"/>
           </a:p>
@@ -7933,7 +7933,7 @@
                 <a:ea typeface="Trebuchet MS" pitchFamily="34" charset="-122"/>
                 <a:cs typeface="Trebuchet MS" pitchFamily="34" charset="-120"/>
               </a:rPr>
-              <a:t>struct</a:t>
+              <a:t>nect</a:t>
             </a:r>
             <a:endParaRPr lang="en-US" sz="1300" dirty="0"/>
           </a:p>
@@ -7972,7 +7972,7 @@
                 <a:ea typeface="Calibri" pitchFamily="34" charset="-122"/>
                 <a:cs typeface="Calibri" pitchFamily="34" charset="-120"/>
               </a:rPr>
-              <a:t>build</a:t>
+              <a:t>bind, tie</a:t>
             </a:r>
             <a:endParaRPr lang="en-US" sz="850" dirty="0"/>
           </a:p>
@@ -8667,7 +8667,7 @@
                 <a:ea typeface="Trebuchet MS" pitchFamily="34" charset="-122"/>
                 <a:cs typeface="Trebuchet MS" pitchFamily="34" charset="-120"/>
               </a:rPr>
-              <a:t>construct</a:t>
+              <a:t>connect</a:t>
             </a:r>
             <a:endParaRPr lang="en-US" sz="2800" dirty="0"/>
           </a:p>
@@ -8918,7 +8918,7 @@
                 <a:ea typeface="Trebuchet MS" pitchFamily="34" charset="-122"/>
                 <a:cs typeface="Trebuchet MS" pitchFamily="34" charset="-120"/>
               </a:rPr>
-              <a:t>struct</a:t>
+              <a:t>nect</a:t>
             </a:r>
             <a:endParaRPr lang="en-US" sz="1300" dirty="0"/>
           </a:p>
@@ -8957,7 +8957,7 @@
                 <a:ea typeface="Calibri" pitchFamily="34" charset="-122"/>
                 <a:cs typeface="Calibri" pitchFamily="34" charset="-120"/>
               </a:rPr>
-              <a:t>build</a:t>
+              <a:t>bind, tie</a:t>
             </a:r>
             <a:endParaRPr lang="en-US" sz="850" dirty="0"/>
           </a:p>
@@ -9221,7 +9221,7 @@
                 <a:ea typeface="Trebuchet MS" pitchFamily="34" charset="-122"/>
                 <a:cs typeface="Trebuchet MS" pitchFamily="34" charset="-120"/>
               </a:rPr>
-              <a:t>struct</a:t>
+              <a:t>nect</a:t>
             </a:r>
             <a:endParaRPr lang="en-US" sz="1400" dirty="0"/>
           </a:p>
@@ -9784,7 +9784,7 @@
                 <a:ea typeface="Trebuchet MS" pitchFamily="34" charset="-122"/>
                 <a:cs typeface="Trebuchet MS" pitchFamily="34" charset="-120"/>
               </a:rPr>
-              <a:t>construct</a:t>
+              <a:t>connect</a:t>
             </a:r>
             <a:endParaRPr lang="en-US" sz="2800" dirty="0"/>
           </a:p>
@@ -10035,7 +10035,7 @@
                 <a:ea typeface="Trebuchet MS" pitchFamily="34" charset="-122"/>
                 <a:cs typeface="Trebuchet MS" pitchFamily="34" charset="-120"/>
               </a:rPr>
-              <a:t>struct</a:t>
+              <a:t>nect</a:t>
             </a:r>
             <a:endParaRPr lang="en-US" sz="1300" dirty="0"/>
           </a:p>
@@ -10074,7 +10074,7 @@
                 <a:ea typeface="Calibri" pitchFamily="34" charset="-122"/>
                 <a:cs typeface="Calibri" pitchFamily="34" charset="-120"/>
               </a:rPr>
-              <a:t>build</a:t>
+              <a:t>bind, tie</a:t>
             </a:r>
             <a:endParaRPr lang="en-US" sz="850" dirty="0"/>
           </a:p>
@@ -10338,7 +10338,7 @@
                 <a:ea typeface="Trebuchet MS" pitchFamily="34" charset="-122"/>
                 <a:cs typeface="Trebuchet MS" pitchFamily="34" charset="-120"/>
               </a:rPr>
-              <a:t>struct</a:t>
+              <a:t>nect</a:t>
             </a:r>
             <a:endParaRPr lang="en-US" sz="1400" dirty="0"/>
           </a:p>
@@ -10419,11 +10419,11 @@
         <p:spPr>
           <a:xfrm>
             <a:off x="1874520" y="4096512"/>
-            <a:ext cx="6903720" cy="658368"/>
+            <a:ext cx="6903720" cy="804672"/>
           </a:xfrm>
           <a:prstGeom prst="rect">
             <a:avLst>
-              <a:gd name="adj" fmla="val 8333"/>
+              <a:gd name="adj" fmla="val 6818"/>
             </a:avLst>
           </a:prstGeom>
           <a:solidFill>
@@ -10445,12 +10445,12 @@
         </p:nvSpPr>
         <p:spPr>
           <a:xfrm>
-            <a:off x="2023872" y="4169664"/>
-            <a:ext cx="685800" cy="475488"/>
+            <a:off x="2254649" y="4169664"/>
+            <a:ext cx="685800" cy="384048"/>
           </a:xfrm>
           <a:prstGeom prst="rect">
             <a:avLst>
-              <a:gd name="adj" fmla="val 7692"/>
+              <a:gd name="adj" fmla="val 9524"/>
             </a:avLst>
           </a:prstGeom>
           <a:solidFill>
@@ -10472,8 +10472,8 @@
         </p:nvSpPr>
         <p:spPr>
           <a:xfrm>
-            <a:off x="2023872" y="4169664"/>
-            <a:ext cx="685800" cy="475488"/>
+            <a:off x="2254649" y="4169664"/>
+            <a:ext cx="685800" cy="384048"/>
           </a:xfrm>
           <a:prstGeom prst="rect">
             <a:avLst/>
@@ -10511,12 +10511,12 @@
         </p:nvSpPr>
         <p:spPr>
           <a:xfrm>
-            <a:off x="2831592" y="4169664"/>
-            <a:ext cx="685800" cy="475488"/>
+            <a:off x="3293146" y="4169664"/>
+            <a:ext cx="685800" cy="384048"/>
           </a:xfrm>
           <a:prstGeom prst="rect">
             <a:avLst>
-              <a:gd name="adj" fmla="val 7692"/>
+              <a:gd name="adj" fmla="val 9524"/>
             </a:avLst>
           </a:prstGeom>
           <a:solidFill>
@@ -10538,8 +10538,8 @@
         </p:nvSpPr>
         <p:spPr>
           <a:xfrm>
-            <a:off x="2831592" y="4169664"/>
-            <a:ext cx="685800" cy="475488"/>
+            <a:off x="3293146" y="4169664"/>
+            <a:ext cx="685800" cy="384048"/>
           </a:xfrm>
           <a:prstGeom prst="rect">
             <a:avLst/>
@@ -10577,12 +10577,12 @@
         </p:nvSpPr>
         <p:spPr>
           <a:xfrm>
-            <a:off x="3639312" y="4169664"/>
-            <a:ext cx="685800" cy="475488"/>
+            <a:off x="4331643" y="4169664"/>
+            <a:ext cx="685800" cy="384048"/>
           </a:xfrm>
           <a:prstGeom prst="rect">
             <a:avLst>
-              <a:gd name="adj" fmla="val 7692"/>
+              <a:gd name="adj" fmla="val 9524"/>
             </a:avLst>
           </a:prstGeom>
           <a:solidFill>
@@ -10604,8 +10604,8 @@
         </p:nvSpPr>
         <p:spPr>
           <a:xfrm>
-            <a:off x="3639312" y="4169664"/>
-            <a:ext cx="685800" cy="475488"/>
+            <a:off x="4331643" y="4169664"/>
+            <a:ext cx="685800" cy="384048"/>
           </a:xfrm>
           <a:prstGeom prst="rect">
             <a:avLst/>
@@ -10629,7 +10629,7 @@
                 <a:ea typeface="Trebuchet MS" pitchFamily="34" charset="-122"/>
                 <a:cs typeface="Trebuchet MS" pitchFamily="34" charset="-120"/>
               </a:rPr>
-              <a:t>n</a:t>
+              <a:t>nn</a:t>
             </a:r>
             <a:endParaRPr lang="en-US" sz="900" dirty="0"/>
           </a:p>
@@ -10637,18 +10637,57 @@
       </p:sp>
       <p:sp>
         <p:nvSpPr>
-          <p:cNvPr id="39" name="Shape 37"/>
-          <p:cNvSpPr/>
-          <p:nvPr/>
-        </p:nvSpPr>
-        <p:spPr>
-          <a:xfrm>
-            <a:off x="4447032" y="4169664"/>
-            <a:ext cx="685800" cy="475488"/>
+          <p:cNvPr id="39" name="Text 37"/>
+          <p:cNvSpPr/>
+          <p:nvPr/>
+        </p:nvSpPr>
+        <p:spPr>
+          <a:xfrm>
+            <a:off x="4331643" y="4572000"/>
+            <a:ext cx="685800" cy="219456"/>
+          </a:xfrm>
+          <a:prstGeom prst="rect">
+            <a:avLst/>
+          </a:prstGeom>
+          <a:noFill/>
+          <a:ln/>
+        </p:spPr>
+        <p:txBody>
+          <a:bodyPr wrap="square" lIns="0" tIns="0" rIns="0" bIns="0" rtlCol="0" anchor="t"/>
+          <a:lstStyle/>
+          <a:p>
+            <a:pPr algn="ctr" indent="0" marL="0">
+              <a:buNone/>
+            </a:pPr>
+            <a:r>
+              <a:rPr lang="en-US" sz="750" i="1" dirty="0">
+                <a:solidFill>
+                  <a:srgbClr val="94A3B8"/>
+                </a:solidFill>
+                <a:latin typeface="Calibri" pitchFamily="34" charset="0"/>
+                <a:ea typeface="Calibri" pitchFamily="34" charset="-122"/>
+                <a:cs typeface="Calibri" pitchFamily="34" charset="-120"/>
+              </a:rPr>
+              <a:t>/n/</a:t>
+            </a:r>
+            <a:endParaRPr lang="en-US" sz="750" dirty="0"/>
+          </a:p>
+        </p:txBody>
+      </p:sp>
+      <p:sp>
+        <p:nvSpPr>
+          <p:cNvPr id="40" name="Shape 38"/>
+          <p:cNvSpPr/>
+          <p:nvPr/>
+        </p:nvSpPr>
+        <p:spPr>
+          <a:xfrm>
+            <a:off x="5370141" y="4169664"/>
+            <a:ext cx="685800" cy="384048"/>
           </a:xfrm>
           <a:prstGeom prst="rect">
             <a:avLst>
-              <a:gd name="adj" fmla="val 7692"/>
+              <a:gd name="adj" fmla="val 9524"/>
             </a:avLst>
           </a:prstGeom>
           <a:solidFill>
@@ -10664,14 +10703,14 @@
       </p:sp>
       <p:sp>
         <p:nvSpPr>
-          <p:cNvPr id="40" name="Text 38"/>
-          <p:cNvSpPr/>
-          <p:nvPr/>
-        </p:nvSpPr>
-        <p:spPr>
-          <a:xfrm>
-            <a:off x="4447032" y="4169664"/>
-            <a:ext cx="685800" cy="475488"/>
+          <p:cNvPr id="41" name="Text 39"/>
+          <p:cNvSpPr/>
+          <p:nvPr/>
+        </p:nvSpPr>
+        <p:spPr>
+          <a:xfrm>
+            <a:off x="5370141" y="4169664"/>
+            <a:ext cx="685800" cy="384048"/>
           </a:xfrm>
           <a:prstGeom prst="rect">
             <a:avLst/>
@@ -10695,7 +10734,7 @@
                 <a:ea typeface="Trebuchet MS" pitchFamily="34" charset="-122"/>
                 <a:cs typeface="Trebuchet MS" pitchFamily="34" charset="-120"/>
               </a:rPr>
-              <a:t>s</a:t>
+              <a:t>e</a:t>
             </a:r>
             <a:endParaRPr lang="en-US" sz="900" dirty="0"/>
           </a:p>
@@ -10703,18 +10742,18 @@
       </p:sp>
       <p:sp>
         <p:nvSpPr>
-          <p:cNvPr id="41" name="Shape 39"/>
-          <p:cNvSpPr/>
-          <p:nvPr/>
-        </p:nvSpPr>
-        <p:spPr>
-          <a:xfrm>
-            <a:off x="5254752" y="4169664"/>
-            <a:ext cx="685800" cy="475488"/>
+          <p:cNvPr id="42" name="Shape 40"/>
+          <p:cNvSpPr/>
+          <p:nvPr/>
+        </p:nvSpPr>
+        <p:spPr>
+          <a:xfrm>
+            <a:off x="6408638" y="4169664"/>
+            <a:ext cx="685800" cy="384048"/>
           </a:xfrm>
           <a:prstGeom prst="rect">
             <a:avLst>
-              <a:gd name="adj" fmla="val 7692"/>
+              <a:gd name="adj" fmla="val 9524"/>
             </a:avLst>
           </a:prstGeom>
           <a:solidFill>
@@ -10730,14 +10769,14 @@
       </p:sp>
       <p:sp>
         <p:nvSpPr>
-          <p:cNvPr id="42" name="Text 40"/>
-          <p:cNvSpPr/>
-          <p:nvPr/>
-        </p:nvSpPr>
-        <p:spPr>
-          <a:xfrm>
-            <a:off x="5254752" y="4169664"/>
-            <a:ext cx="685800" cy="475488"/>
+          <p:cNvPr id="43" name="Text 41"/>
+          <p:cNvSpPr/>
+          <p:nvPr/>
+        </p:nvSpPr>
+        <p:spPr>
+          <a:xfrm>
+            <a:off x="6408638" y="4169664"/>
+            <a:ext cx="685800" cy="384048"/>
           </a:xfrm>
           <a:prstGeom prst="rect">
             <a:avLst/>
@@ -10761,7 +10800,7 @@
                 <a:ea typeface="Trebuchet MS" pitchFamily="34" charset="-122"/>
                 <a:cs typeface="Trebuchet MS" pitchFamily="34" charset="-120"/>
               </a:rPr>
-              <a:t>t</a:t>
+              <a:t>c</a:t>
             </a:r>
             <a:endParaRPr lang="en-US" sz="900" dirty="0"/>
           </a:p>
@@ -10769,18 +10808,18 @@
       </p:sp>
       <p:sp>
         <p:nvSpPr>
-          <p:cNvPr id="43" name="Shape 41"/>
-          <p:cNvSpPr/>
-          <p:nvPr/>
-        </p:nvSpPr>
-        <p:spPr>
-          <a:xfrm>
-            <a:off x="6062472" y="4169664"/>
-            <a:ext cx="685800" cy="475488"/>
+          <p:cNvPr id="44" name="Shape 42"/>
+          <p:cNvSpPr/>
+          <p:nvPr/>
+        </p:nvSpPr>
+        <p:spPr>
+          <a:xfrm>
+            <a:off x="7447135" y="4169664"/>
+            <a:ext cx="685800" cy="384048"/>
           </a:xfrm>
           <a:prstGeom prst="rect">
             <a:avLst>
-              <a:gd name="adj" fmla="val 7692"/>
+              <a:gd name="adj" fmla="val 9524"/>
             </a:avLst>
           </a:prstGeom>
           <a:solidFill>
@@ -10796,14 +10835,14 @@
       </p:sp>
       <p:sp>
         <p:nvSpPr>
-          <p:cNvPr id="44" name="Text 42"/>
-          <p:cNvSpPr/>
-          <p:nvPr/>
-        </p:nvSpPr>
-        <p:spPr>
-          <a:xfrm>
-            <a:off x="6062472" y="4169664"/>
-            <a:ext cx="685800" cy="475488"/>
+          <p:cNvPr id="45" name="Text 43"/>
+          <p:cNvSpPr/>
+          <p:nvPr/>
+        </p:nvSpPr>
+        <p:spPr>
+          <a:xfrm>
+            <a:off x="7447135" y="4169664"/>
+            <a:ext cx="685800" cy="384048"/>
           </a:xfrm>
           <a:prstGeom prst="rect">
             <a:avLst/>
@@ -10827,139 +10866,7 @@
                 <a:ea typeface="Trebuchet MS" pitchFamily="34" charset="-122"/>
                 <a:cs typeface="Trebuchet MS" pitchFamily="34" charset="-120"/>
               </a:rPr>
-              <a:t>r</a:t>
-            </a:r>
-            <a:endParaRPr lang="en-US" sz="900" dirty="0"/>
-          </a:p>
-        </p:txBody>
-      </p:sp>
-      <p:sp>
-        <p:nvSpPr>
-          <p:cNvPr id="45" name="Shape 43"/>
-          <p:cNvSpPr/>
-          <p:nvPr/>
-        </p:nvSpPr>
-        <p:spPr>
-          <a:xfrm>
-            <a:off x="6870192" y="4169664"/>
-            <a:ext cx="685800" cy="475488"/>
-          </a:xfrm>
-          <a:prstGeom prst="rect">
-            <a:avLst>
-              <a:gd name="adj" fmla="val 7692"/>
-            </a:avLst>
-          </a:prstGeom>
-          <a:solidFill>
-            <a:srgbClr val="FFFFFF"/>
-          </a:solidFill>
-          <a:ln w="12700">
-            <a:solidFill>
-              <a:srgbClr val="DB2777"/>
-            </a:solidFill>
-            <a:prstDash val="solid"/>
-          </a:ln>
-        </p:spPr>
-      </p:sp>
-      <p:sp>
-        <p:nvSpPr>
-          <p:cNvPr id="46" name="Text 44"/>
-          <p:cNvSpPr/>
-          <p:nvPr/>
-        </p:nvSpPr>
-        <p:spPr>
-          <a:xfrm>
-            <a:off x="6870192" y="4169664"/>
-            <a:ext cx="685800" cy="475488"/>
-          </a:xfrm>
-          <a:prstGeom prst="rect">
-            <a:avLst/>
-          </a:prstGeom>
-          <a:noFill/>
-          <a:ln/>
-        </p:spPr>
-        <p:txBody>
-          <a:bodyPr wrap="square" lIns="0" tIns="0" rIns="0" bIns="0" rtlCol="0" anchor="ctr"/>
-          <a:lstStyle/>
-          <a:p>
-            <a:pPr algn="ctr" indent="0" marL="0">
-              <a:buNone/>
-            </a:pPr>
-            <a:r>
-              <a:rPr lang="en-US" sz="900" b="1" dirty="0">
-                <a:solidFill>
-                  <a:srgbClr val="9D174D"/>
-                </a:solidFill>
-                <a:latin typeface="Trebuchet MS" pitchFamily="34" charset="0"/>
-                <a:ea typeface="Trebuchet MS" pitchFamily="34" charset="-122"/>
-                <a:cs typeface="Trebuchet MS" pitchFamily="34" charset="-120"/>
-              </a:rPr>
-              <a:t>u</a:t>
-            </a:r>
-            <a:endParaRPr lang="en-US" sz="900" dirty="0"/>
-          </a:p>
-        </p:txBody>
-      </p:sp>
-      <p:sp>
-        <p:nvSpPr>
-          <p:cNvPr id="47" name="Shape 45"/>
-          <p:cNvSpPr/>
-          <p:nvPr/>
-        </p:nvSpPr>
-        <p:spPr>
-          <a:xfrm>
-            <a:off x="7677912" y="4169664"/>
-            <a:ext cx="685800" cy="475488"/>
-          </a:xfrm>
-          <a:prstGeom prst="rect">
-            <a:avLst>
-              <a:gd name="adj" fmla="val 7692"/>
-            </a:avLst>
-          </a:prstGeom>
-          <a:solidFill>
-            <a:srgbClr val="FFFFFF"/>
-          </a:solidFill>
-          <a:ln w="12700">
-            <a:solidFill>
-              <a:srgbClr val="DB2777"/>
-            </a:solidFill>
-            <a:prstDash val="solid"/>
-          </a:ln>
-        </p:spPr>
-      </p:sp>
-      <p:sp>
-        <p:nvSpPr>
-          <p:cNvPr id="48" name="Text 46"/>
-          <p:cNvSpPr/>
-          <p:nvPr/>
-        </p:nvSpPr>
-        <p:spPr>
-          <a:xfrm>
-            <a:off x="7677912" y="4169664"/>
-            <a:ext cx="685800" cy="475488"/>
-          </a:xfrm>
-          <a:prstGeom prst="rect">
-            <a:avLst/>
-          </a:prstGeom>
-          <a:noFill/>
-          <a:ln/>
-        </p:spPr>
-        <p:txBody>
-          <a:bodyPr wrap="square" lIns="0" tIns="0" rIns="0" bIns="0" rtlCol="0" anchor="ctr"/>
-          <a:lstStyle/>
-          <a:p>
-            <a:pPr algn="ctr" indent="0" marL="0">
-              <a:buNone/>
-            </a:pPr>
-            <a:r>
-              <a:rPr lang="en-US" sz="900" b="1" dirty="0">
-                <a:solidFill>
-                  <a:srgbClr val="9D174D"/>
-                </a:solidFill>
-                <a:latin typeface="Trebuchet MS" pitchFamily="34" charset="0"/>
-                <a:ea typeface="Trebuchet MS" pitchFamily="34" charset="-122"/>
-                <a:cs typeface="Trebuchet MS" pitchFamily="34" charset="-120"/>
-              </a:rPr>
-              <a:t>ct</a:t>
+              <a:t>t</a:t>
             </a:r>
             <a:endParaRPr lang="en-US" sz="900" dirty="0"/>
           </a:p>
@@ -12507,7 +12414,7 @@
                 <a:ea typeface="Calibri" pitchFamily="34" charset="-122"/>
                 <a:cs typeface="Calibri" pitchFamily="34" charset="-120"/>
               </a:rPr>
-              <a:t>make strong or fixed</a:t>
+              <a:t>strong, steady</a:t>
             </a:r>
             <a:endParaRPr lang="en-US" sz="850" dirty="0"/>
           </a:p>
@@ -13492,7 +13399,7 @@
                 <a:ea typeface="Calibri" pitchFamily="34" charset="-122"/>
                 <a:cs typeface="Calibri" pitchFamily="34" charset="-120"/>
               </a:rPr>
-              <a:t>make strong or fixed</a:t>
+              <a:t>strong, steady</a:t>
             </a:r>
             <a:endParaRPr lang="en-US" sz="850" dirty="0"/>
           </a:p>
@@ -14874,7 +14781,7 @@
                 <a:ea typeface="Calibri" pitchFamily="34" charset="-122"/>
                 <a:cs typeface="Calibri" pitchFamily="34" charset="-120"/>
               </a:rPr>
-              <a:t>make strong or fixed</a:t>
+              <a:t>strong, steady</a:t>
             </a:r>
             <a:endParaRPr lang="en-US" sz="850" dirty="0"/>
           </a:p>
@@ -16953,7 +16860,7 @@
                 <a:ea typeface="Calibri" pitchFamily="34" charset="-122"/>
                 <a:cs typeface="Calibri" pitchFamily="34" charset="-120"/>
               </a:rPr>
-              <a:t>After the meeting, we had to </a:t>
+              <a:t>After much </a:t>
             </a:r>
             <a:pPr algn="l" indent="0" marL="0">
               <a:buNone/>
@@ -16970,7 +16877,7 @@
                 <a:ea typeface="Calibri" pitchFamily="34" charset="-122"/>
                 <a:cs typeface="Calibri" pitchFamily="34" charset="-120"/>
               </a:rPr>
-              <a:t>consider</a:t>
+              <a:t>consideration</a:t>
             </a:r>
             <a:pPr algn="l" indent="0" marL="0">
               <a:buNone/>
@@ -16984,7 +16891,7 @@
                 <a:ea typeface="Calibri" pitchFamily="34" charset="-122"/>
                 <a:cs typeface="Calibri" pitchFamily="34" charset="-120"/>
               </a:rPr>
-              <a:t> the plan, </a:t>
+              <a:t>, the builder decided to </a:t>
             </a:r>
             <a:pPr algn="l" indent="0" marL="0">
               <a:buNone/>
@@ -17001,7 +16908,7 @@
                 <a:ea typeface="Calibri" pitchFamily="34" charset="-122"/>
                 <a:cs typeface="Calibri" pitchFamily="34" charset="-120"/>
               </a:rPr>
-              <a:t>connect</a:t>
+              <a:t>construct</a:t>
             </a:r>
             <a:pPr algn="l" indent="0" marL="0">
               <a:buNone/>
@@ -17015,7 +16922,7 @@
                 <a:ea typeface="Calibri" pitchFamily="34" charset="-122"/>
                 <a:cs typeface="Calibri" pitchFamily="34" charset="-120"/>
               </a:rPr>
-              <a:t> our ideas, and </a:t>
+              <a:t> the shelter and </a:t>
             </a:r>
             <a:pPr algn="l" indent="0" marL="0">
               <a:buNone/>
@@ -17032,7 +16939,7 @@
                 <a:ea typeface="Calibri" pitchFamily="34" charset="-122"/>
                 <a:cs typeface="Calibri" pitchFamily="34" charset="-120"/>
               </a:rPr>
-              <a:t>conclude</a:t>
+              <a:t>contribute</a:t>
             </a:r>
             <a:pPr algn="l" indent="0" marL="0">
               <a:buNone/>
@@ -17046,7 +16953,7 @@
                 <a:ea typeface="Calibri" pitchFamily="34" charset="-122"/>
                 <a:cs typeface="Calibri" pitchFamily="34" charset="-120"/>
               </a:rPr>
-              <a:t> with a decision.</a:t>
+              <a:t> supplies to the camp.</a:t>
             </a:r>
             <a:endParaRPr lang="en-US" sz="1800" dirty="0"/>
           </a:p>
@@ -17201,7 +17108,7 @@
                 <a:ea typeface="Trebuchet MS" pitchFamily="34" charset="-122"/>
                 <a:cs typeface="Trebuchet MS" pitchFamily="34" charset="-120"/>
               </a:rPr>
-              <a:t>consider</a:t>
+              <a:t>consideration</a:t>
             </a:r>
             <a:endParaRPr lang="en-US" sz="1400" dirty="0"/>
           </a:p>
@@ -17329,7 +17236,7 @@
                 <a:ea typeface="Trebuchet MS" pitchFamily="34" charset="-122"/>
                 <a:cs typeface="Trebuchet MS" pitchFamily="34" charset="-120"/>
               </a:rPr>
-              <a:t>connect</a:t>
+              <a:t>construct</a:t>
             </a:r>
             <a:endParaRPr lang="en-US" sz="1400" dirty="0"/>
           </a:p>
@@ -17457,7 +17364,7 @@
                 <a:ea typeface="Trebuchet MS" pitchFamily="34" charset="-122"/>
                 <a:cs typeface="Trebuchet MS" pitchFamily="34" charset="-120"/>
               </a:rPr>
-              <a:t>conclude</a:t>
+              <a:t>contribute</a:t>
             </a:r>
             <a:endParaRPr lang="en-US" sz="1400" dirty="0"/>
           </a:p>
@@ -17927,7 +17834,7 @@
                 <a:ea typeface="Trebuchet MS" pitchFamily="34" charset="-122"/>
                 <a:cs typeface="Trebuchet MS" pitchFamily="34" charset="-120"/>
               </a:rPr>
-              <a:t>consider</a:t>
+              <a:t>consideration</a:t>
             </a:r>
             <a:endParaRPr lang="en-US" sz="2800" dirty="0"/>
           </a:p>
@@ -18754,7 +18661,7 @@
                 <a:ea typeface="Trebuchet MS" pitchFamily="34" charset="-122"/>
                 <a:cs typeface="Trebuchet MS" pitchFamily="34" charset="-120"/>
               </a:rPr>
-              <a:t>consider</a:t>
+              <a:t>consideration</a:t>
             </a:r>
             <a:endParaRPr lang="en-US" sz="2800" dirty="0"/>
           </a:p>
@@ -18834,7 +18741,7 @@
         </p:nvSpPr>
         <p:spPr>
           <a:xfrm>
-            <a:off x="2938272" y="2258568"/>
+            <a:off x="2221992" y="2258568"/>
             <a:ext cx="1828800" cy="292608"/>
           </a:xfrm>
           <a:prstGeom prst="rect">
@@ -18868,7 +18775,7 @@
         </p:nvSpPr>
         <p:spPr>
           <a:xfrm>
-            <a:off x="2938272" y="2258568"/>
+            <a:off x="2221992" y="2258568"/>
             <a:ext cx="1828800" cy="292608"/>
           </a:xfrm>
           <a:prstGeom prst="rect">
@@ -18907,7 +18814,7 @@
         </p:nvSpPr>
         <p:spPr>
           <a:xfrm>
-            <a:off x="2938272" y="2569464"/>
+            <a:off x="2221992" y="2569464"/>
             <a:ext cx="1828800" cy="201168"/>
           </a:xfrm>
           <a:prstGeom prst="rect">
@@ -18946,7 +18853,7 @@
         </p:nvSpPr>
         <p:spPr>
           <a:xfrm>
-            <a:off x="5803392" y="2258568"/>
+            <a:off x="4370832" y="2258568"/>
             <a:ext cx="1828800" cy="292608"/>
           </a:xfrm>
           <a:prstGeom prst="rect">
@@ -18980,7 +18887,7 @@
         </p:nvSpPr>
         <p:spPr>
           <a:xfrm>
-            <a:off x="5803392" y="2258568"/>
+            <a:off x="4370832" y="2258568"/>
             <a:ext cx="1828800" cy="292608"/>
           </a:xfrm>
           <a:prstGeom prst="rect">
@@ -19019,7 +18926,7 @@
         </p:nvSpPr>
         <p:spPr>
           <a:xfrm>
-            <a:off x="5803392" y="2569464"/>
+            <a:off x="4370832" y="2569464"/>
             <a:ext cx="1828800" cy="201168"/>
           </a:xfrm>
           <a:prstGeom prst="rect">
@@ -19044,7 +18951,7 @@
                 <a:ea typeface="Calibri" pitchFamily="34" charset="-122"/>
                 <a:cs typeface="Calibri" pitchFamily="34" charset="-120"/>
               </a:rPr>
-              <a:t>examine, think about</a:t>
+              <a:t>think, observe</a:t>
             </a:r>
             <a:endParaRPr lang="en-US" sz="850" dirty="0"/>
           </a:p>
@@ -19053,6 +18960,118 @@
       <p:sp>
         <p:nvSpPr>
           <p:cNvPr id="22" name="Shape 20"/>
+          <p:cNvSpPr/>
+          <p:nvPr/>
+        </p:nvSpPr>
+        <p:spPr>
+          <a:xfrm>
+            <a:off x="6519672" y="2258568"/>
+            <a:ext cx="1828800" cy="292608"/>
+          </a:xfrm>
+          <a:prstGeom prst="rect">
+            <a:avLst>
+              <a:gd name="adj" fmla="val 25000"/>
+            </a:avLst>
+          </a:prstGeom>
+          <a:solidFill>
+            <a:srgbClr val="FCE7F3"/>
+          </a:solidFill>
+          <a:ln w="19050">
+            <a:solidFill>
+              <a:srgbClr val="DB2777"/>
+            </a:solidFill>
+            <a:prstDash val="solid"/>
+          </a:ln>
+          <a:effectLst>
+            <a:outerShdw sx="100000" sy="100000" kx="0" ky="0" algn="bl" rotWithShape="0" blurRad="101600" dist="38100" dir="8100000">
+              <a:srgbClr val="000000">
+                <a:alpha val="12000"/>
+              </a:srgbClr>
+            </a:outerShdw>
+          </a:effectLst>
+        </p:spPr>
+      </p:sp>
+      <p:sp>
+        <p:nvSpPr>
+          <p:cNvPr id="23" name="Text 21"/>
+          <p:cNvSpPr/>
+          <p:nvPr/>
+        </p:nvSpPr>
+        <p:spPr>
+          <a:xfrm>
+            <a:off x="6519672" y="2258568"/>
+            <a:ext cx="1828800" cy="292608"/>
+          </a:xfrm>
+          <a:prstGeom prst="rect">
+            <a:avLst/>
+          </a:prstGeom>
+          <a:noFill/>
+          <a:ln/>
+        </p:spPr>
+        <p:txBody>
+          <a:bodyPr wrap="square" lIns="0" tIns="0" rIns="0" bIns="0" rtlCol="0" anchor="ctr"/>
+          <a:lstStyle/>
+          <a:p>
+            <a:pPr algn="ctr" indent="0" marL="0">
+              <a:buNone/>
+            </a:pPr>
+            <a:r>
+              <a:rPr lang="en-US" sz="1300" b="1" dirty="0">
+                <a:solidFill>
+                  <a:srgbClr val="9D174D"/>
+                </a:solidFill>
+                <a:latin typeface="Trebuchet MS" pitchFamily="34" charset="0"/>
+                <a:ea typeface="Trebuchet MS" pitchFamily="34" charset="-122"/>
+                <a:cs typeface="Trebuchet MS" pitchFamily="34" charset="-120"/>
+              </a:rPr>
+              <a:t>ation</a:t>
+            </a:r>
+            <a:endParaRPr lang="en-US" sz="1300" dirty="0"/>
+          </a:p>
+        </p:txBody>
+      </p:sp>
+      <p:sp>
+        <p:nvSpPr>
+          <p:cNvPr id="24" name="Text 22"/>
+          <p:cNvSpPr/>
+          <p:nvPr/>
+        </p:nvSpPr>
+        <p:spPr>
+          <a:xfrm>
+            <a:off x="6519672" y="2569464"/>
+            <a:ext cx="1828800" cy="201168"/>
+          </a:xfrm>
+          <a:prstGeom prst="rect">
+            <a:avLst/>
+          </a:prstGeom>
+          <a:noFill/>
+          <a:ln/>
+        </p:spPr>
+        <p:txBody>
+          <a:bodyPr wrap="square" lIns="0" tIns="0" rIns="0" bIns="0" rtlCol="0" anchor="t"/>
+          <a:lstStyle/>
+          <a:p>
+            <a:pPr algn="ctr" indent="0" marL="0">
+              <a:buNone/>
+            </a:pPr>
+            <a:r>
+              <a:rPr lang="en-US" sz="850" dirty="0">
+                <a:solidFill>
+                  <a:srgbClr val="475569"/>
+                </a:solidFill>
+                <a:latin typeface="Calibri" pitchFamily="34" charset="0"/>
+                <a:ea typeface="Calibri" pitchFamily="34" charset="-122"/>
+                <a:cs typeface="Calibri" pitchFamily="34" charset="-120"/>
+              </a:rPr>
+              <a:t>act or process of</a:t>
+            </a:r>
+            <a:endParaRPr lang="en-US" sz="850" dirty="0"/>
+          </a:p>
+        </p:txBody>
+      </p:sp>
+      <p:sp>
+        <p:nvSpPr>
+          <p:cNvPr id="25" name="Shape 23"/>
           <p:cNvSpPr/>
           <p:nvPr/>
         </p:nvSpPr>
@@ -19079,7 +19098,7 @@
       </p:sp>
       <p:sp>
         <p:nvSpPr>
-          <p:cNvPr id="23" name="Text 21"/>
+          <p:cNvPr id="26" name="Text 24"/>
           <p:cNvSpPr/>
           <p:nvPr/>
         </p:nvSpPr>
@@ -19118,7 +19137,7 @@
       </p:sp>
       <p:sp>
         <p:nvSpPr>
-          <p:cNvPr id="24" name="Shape 22"/>
+          <p:cNvPr id="27" name="Shape 25"/>
           <p:cNvSpPr/>
           <p:nvPr/>
         </p:nvSpPr>
@@ -19145,7 +19164,7 @@
       </p:sp>
       <p:sp>
         <p:nvSpPr>
-          <p:cNvPr id="25" name="Text 23"/>
+          <p:cNvPr id="28" name="Text 26"/>
           <p:cNvSpPr/>
           <p:nvPr/>
         </p:nvSpPr>
@@ -19184,7 +19203,7 @@
       </p:sp>
       <p:sp>
         <p:nvSpPr>
-          <p:cNvPr id="26" name="Shape 24"/>
+          <p:cNvPr id="29" name="Shape 27"/>
           <p:cNvSpPr/>
           <p:nvPr/>
         </p:nvSpPr>
@@ -19211,7 +19230,7 @@
       </p:sp>
       <p:sp>
         <p:nvSpPr>
-          <p:cNvPr id="27" name="Text 25"/>
+          <p:cNvPr id="30" name="Text 28"/>
           <p:cNvSpPr/>
           <p:nvPr/>
         </p:nvSpPr>
@@ -19250,7 +19269,7 @@
       </p:sp>
       <p:sp>
         <p:nvSpPr>
-          <p:cNvPr id="28" name="Shape 26"/>
+          <p:cNvPr id="31" name="Shape 29"/>
           <p:cNvSpPr/>
           <p:nvPr/>
         </p:nvSpPr>
@@ -19277,7 +19296,7 @@
       </p:sp>
       <p:sp>
         <p:nvSpPr>
-          <p:cNvPr id="29" name="Text 27"/>
+          <p:cNvPr id="32" name="Text 30"/>
           <p:cNvSpPr/>
           <p:nvPr/>
         </p:nvSpPr>
@@ -19739,7 +19758,7 @@
                 <a:ea typeface="Trebuchet MS" pitchFamily="34" charset="-122"/>
                 <a:cs typeface="Trebuchet MS" pitchFamily="34" charset="-120"/>
               </a:rPr>
-              <a:t>consider</a:t>
+              <a:t>consideration</a:t>
             </a:r>
             <a:endParaRPr lang="en-US" sz="2800" dirty="0"/>
           </a:p>
@@ -19819,7 +19838,7 @@
         </p:nvSpPr>
         <p:spPr>
           <a:xfrm>
-            <a:off x="2938272" y="2258568"/>
+            <a:off x="2221992" y="2258568"/>
             <a:ext cx="1828800" cy="292608"/>
           </a:xfrm>
           <a:prstGeom prst="rect">
@@ -19853,7 +19872,7 @@
         </p:nvSpPr>
         <p:spPr>
           <a:xfrm>
-            <a:off x="2938272" y="2258568"/>
+            <a:off x="2221992" y="2258568"/>
             <a:ext cx="1828800" cy="292608"/>
           </a:xfrm>
           <a:prstGeom prst="rect">
@@ -19892,7 +19911,7 @@
         </p:nvSpPr>
         <p:spPr>
           <a:xfrm>
-            <a:off x="2938272" y="2569464"/>
+            <a:off x="2221992" y="2569464"/>
             <a:ext cx="1828800" cy="201168"/>
           </a:xfrm>
           <a:prstGeom prst="rect">
@@ -19931,7 +19950,7 @@
         </p:nvSpPr>
         <p:spPr>
           <a:xfrm>
-            <a:off x="5803392" y="2258568"/>
+            <a:off x="4370832" y="2258568"/>
             <a:ext cx="1828800" cy="292608"/>
           </a:xfrm>
           <a:prstGeom prst="rect">
@@ -19965,7 +19984,7 @@
         </p:nvSpPr>
         <p:spPr>
           <a:xfrm>
-            <a:off x="5803392" y="2258568"/>
+            <a:off x="4370832" y="2258568"/>
             <a:ext cx="1828800" cy="292608"/>
           </a:xfrm>
           <a:prstGeom prst="rect">
@@ -20004,7 +20023,7 @@
         </p:nvSpPr>
         <p:spPr>
           <a:xfrm>
-            <a:off x="5803392" y="2569464"/>
+            <a:off x="4370832" y="2569464"/>
             <a:ext cx="1828800" cy="201168"/>
           </a:xfrm>
           <a:prstGeom prst="rect">
@@ -20029,7 +20048,7 @@
                 <a:ea typeface="Calibri" pitchFamily="34" charset="-122"/>
                 <a:cs typeface="Calibri" pitchFamily="34" charset="-120"/>
               </a:rPr>
-              <a:t>examine, think about</a:t>
+              <a:t>think, observe</a:t>
             </a:r>
             <a:endParaRPr lang="en-US" sz="850" dirty="0"/>
           </a:p>
@@ -20038,6 +20057,118 @@
       <p:sp>
         <p:nvSpPr>
           <p:cNvPr id="22" name="Shape 20"/>
+          <p:cNvSpPr/>
+          <p:nvPr/>
+        </p:nvSpPr>
+        <p:spPr>
+          <a:xfrm>
+            <a:off x="6519672" y="2258568"/>
+            <a:ext cx="1828800" cy="292608"/>
+          </a:xfrm>
+          <a:prstGeom prst="rect">
+            <a:avLst>
+              <a:gd name="adj" fmla="val 25000"/>
+            </a:avLst>
+          </a:prstGeom>
+          <a:solidFill>
+            <a:srgbClr val="FCE7F3"/>
+          </a:solidFill>
+          <a:ln w="19050">
+            <a:solidFill>
+              <a:srgbClr val="DB2777"/>
+            </a:solidFill>
+            <a:prstDash val="solid"/>
+          </a:ln>
+          <a:effectLst>
+            <a:outerShdw sx="100000" sy="100000" kx="0" ky="0" algn="bl" rotWithShape="0" blurRad="101600" dist="38100" dir="8100000">
+              <a:srgbClr val="000000">
+                <a:alpha val="12000"/>
+              </a:srgbClr>
+            </a:outerShdw>
+          </a:effectLst>
+        </p:spPr>
+      </p:sp>
+      <p:sp>
+        <p:nvSpPr>
+          <p:cNvPr id="23" name="Text 21"/>
+          <p:cNvSpPr/>
+          <p:nvPr/>
+        </p:nvSpPr>
+        <p:spPr>
+          <a:xfrm>
+            <a:off x="6519672" y="2258568"/>
+            <a:ext cx="1828800" cy="292608"/>
+          </a:xfrm>
+          <a:prstGeom prst="rect">
+            <a:avLst/>
+          </a:prstGeom>
+          <a:noFill/>
+          <a:ln/>
+        </p:spPr>
+        <p:txBody>
+          <a:bodyPr wrap="square" lIns="0" tIns="0" rIns="0" bIns="0" rtlCol="0" anchor="ctr"/>
+          <a:lstStyle/>
+          <a:p>
+            <a:pPr algn="ctr" indent="0" marL="0">
+              <a:buNone/>
+            </a:pPr>
+            <a:r>
+              <a:rPr lang="en-US" sz="1300" b="1" dirty="0">
+                <a:solidFill>
+                  <a:srgbClr val="9D174D"/>
+                </a:solidFill>
+                <a:latin typeface="Trebuchet MS" pitchFamily="34" charset="0"/>
+                <a:ea typeface="Trebuchet MS" pitchFamily="34" charset="-122"/>
+                <a:cs typeface="Trebuchet MS" pitchFamily="34" charset="-120"/>
+              </a:rPr>
+              <a:t>ation</a:t>
+            </a:r>
+            <a:endParaRPr lang="en-US" sz="1300" dirty="0"/>
+          </a:p>
+        </p:txBody>
+      </p:sp>
+      <p:sp>
+        <p:nvSpPr>
+          <p:cNvPr id="24" name="Text 22"/>
+          <p:cNvSpPr/>
+          <p:nvPr/>
+        </p:nvSpPr>
+        <p:spPr>
+          <a:xfrm>
+            <a:off x="6519672" y="2569464"/>
+            <a:ext cx="1828800" cy="201168"/>
+          </a:xfrm>
+          <a:prstGeom prst="rect">
+            <a:avLst/>
+          </a:prstGeom>
+          <a:noFill/>
+          <a:ln/>
+        </p:spPr>
+        <p:txBody>
+          <a:bodyPr wrap="square" lIns="0" tIns="0" rIns="0" bIns="0" rtlCol="0" anchor="t"/>
+          <a:lstStyle/>
+          <a:p>
+            <a:pPr algn="ctr" indent="0" marL="0">
+              <a:buNone/>
+            </a:pPr>
+            <a:r>
+              <a:rPr lang="en-US" sz="850" dirty="0">
+                <a:solidFill>
+                  <a:srgbClr val="475569"/>
+                </a:solidFill>
+                <a:latin typeface="Calibri" pitchFamily="34" charset="0"/>
+                <a:ea typeface="Calibri" pitchFamily="34" charset="-122"/>
+                <a:cs typeface="Calibri" pitchFamily="34" charset="-120"/>
+              </a:rPr>
+              <a:t>act or process of</a:t>
+            </a:r>
+            <a:endParaRPr lang="en-US" sz="850" dirty="0"/>
+          </a:p>
+        </p:txBody>
+      </p:sp>
+      <p:sp>
+        <p:nvSpPr>
+          <p:cNvPr id="25" name="Shape 23"/>
           <p:cNvSpPr/>
           <p:nvPr/>
         </p:nvSpPr>
@@ -20064,7 +20195,7 @@
       </p:sp>
       <p:sp>
         <p:nvSpPr>
-          <p:cNvPr id="23" name="Text 21"/>
+          <p:cNvPr id="26" name="Text 24"/>
           <p:cNvSpPr/>
           <p:nvPr/>
         </p:nvSpPr>
@@ -20103,7 +20234,7 @@
       </p:sp>
       <p:sp>
         <p:nvSpPr>
-          <p:cNvPr id="24" name="Shape 22"/>
+          <p:cNvPr id="27" name="Shape 25"/>
           <p:cNvSpPr/>
           <p:nvPr/>
         </p:nvSpPr>
@@ -20130,14 +20261,14 @@
       </p:sp>
       <p:sp>
         <p:nvSpPr>
-          <p:cNvPr id="25" name="Shape 23"/>
-          <p:cNvSpPr/>
-          <p:nvPr/>
-        </p:nvSpPr>
-        <p:spPr>
-          <a:xfrm>
-            <a:off x="2313432" y="3364992"/>
-            <a:ext cx="1645920" cy="475488"/>
+          <p:cNvPr id="28" name="Shape 26"/>
+          <p:cNvSpPr/>
+          <p:nvPr/>
+        </p:nvSpPr>
+        <p:spPr>
+          <a:xfrm>
+            <a:off x="1978152" y="3364992"/>
+            <a:ext cx="1225296" cy="475488"/>
           </a:xfrm>
           <a:prstGeom prst="rect">
             <a:avLst>
@@ -20157,14 +20288,14 @@
       </p:sp>
       <p:sp>
         <p:nvSpPr>
-          <p:cNvPr id="26" name="Text 24"/>
-          <p:cNvSpPr/>
-          <p:nvPr/>
-        </p:nvSpPr>
-        <p:spPr>
-          <a:xfrm>
-            <a:off x="2313432" y="3364992"/>
-            <a:ext cx="1645920" cy="475488"/>
+          <p:cNvPr id="29" name="Text 27"/>
+          <p:cNvSpPr/>
+          <p:nvPr/>
+        </p:nvSpPr>
+        <p:spPr>
+          <a:xfrm>
+            <a:off x="1978152" y="3364992"/>
+            <a:ext cx="1225296" cy="475488"/>
           </a:xfrm>
           <a:prstGeom prst="rect">
             <a:avLst/>
@@ -20196,14 +20327,14 @@
       </p:sp>
       <p:sp>
         <p:nvSpPr>
-          <p:cNvPr id="27" name="Text 25"/>
-          <p:cNvSpPr/>
-          <p:nvPr/>
-        </p:nvSpPr>
-        <p:spPr>
-          <a:xfrm>
-            <a:off x="3959352" y="3364992"/>
-            <a:ext cx="411480" cy="475488"/>
+          <p:cNvPr id="30" name="Text 28"/>
+          <p:cNvSpPr/>
+          <p:nvPr/>
+        </p:nvSpPr>
+        <p:spPr>
+          <a:xfrm>
+            <a:off x="3203448" y="3364992"/>
+            <a:ext cx="76200" cy="475488"/>
           </a:xfrm>
           <a:prstGeom prst="rect">
             <a:avLst/>
@@ -20235,14 +20366,14 @@
       </p:sp>
       <p:sp>
         <p:nvSpPr>
-          <p:cNvPr id="28" name="Shape 26"/>
-          <p:cNvSpPr/>
-          <p:nvPr/>
-        </p:nvSpPr>
-        <p:spPr>
-          <a:xfrm>
-            <a:off x="4370832" y="3364992"/>
-            <a:ext cx="1645920" cy="475488"/>
+          <p:cNvPr id="31" name="Shape 29"/>
+          <p:cNvSpPr/>
+          <p:nvPr/>
+        </p:nvSpPr>
+        <p:spPr>
+          <a:xfrm>
+            <a:off x="3279648" y="3364992"/>
+            <a:ext cx="1225296" cy="475488"/>
           </a:xfrm>
           <a:prstGeom prst="rect">
             <a:avLst>
@@ -20262,14 +20393,14 @@
       </p:sp>
       <p:sp>
         <p:nvSpPr>
-          <p:cNvPr id="29" name="Text 27"/>
-          <p:cNvSpPr/>
-          <p:nvPr/>
-        </p:nvSpPr>
-        <p:spPr>
-          <a:xfrm>
-            <a:off x="4370832" y="3364992"/>
-            <a:ext cx="1645920" cy="475488"/>
+          <p:cNvPr id="32" name="Text 30"/>
+          <p:cNvSpPr/>
+          <p:nvPr/>
+        </p:nvSpPr>
+        <p:spPr>
+          <a:xfrm>
+            <a:off x="3279648" y="3364992"/>
+            <a:ext cx="1225296" cy="475488"/>
           </a:xfrm>
           <a:prstGeom prst="rect">
             <a:avLst/>
@@ -20301,14 +20432,14 @@
       </p:sp>
       <p:sp>
         <p:nvSpPr>
-          <p:cNvPr id="30" name="Text 28"/>
-          <p:cNvSpPr/>
-          <p:nvPr/>
-        </p:nvSpPr>
-        <p:spPr>
-          <a:xfrm>
-            <a:off x="6016752" y="3364992"/>
-            <a:ext cx="411480" cy="475488"/>
+          <p:cNvPr id="33" name="Text 31"/>
+          <p:cNvSpPr/>
+          <p:nvPr/>
+        </p:nvSpPr>
+        <p:spPr>
+          <a:xfrm>
+            <a:off x="4504944" y="3364992"/>
+            <a:ext cx="76200" cy="475488"/>
           </a:xfrm>
           <a:prstGeom prst="rect">
             <a:avLst/>
@@ -20340,14 +20471,14 @@
       </p:sp>
       <p:sp>
         <p:nvSpPr>
-          <p:cNvPr id="31" name="Shape 29"/>
-          <p:cNvSpPr/>
-          <p:nvPr/>
-        </p:nvSpPr>
-        <p:spPr>
-          <a:xfrm>
-            <a:off x="6428232" y="3364992"/>
-            <a:ext cx="1645920" cy="475488"/>
+          <p:cNvPr id="34" name="Shape 32"/>
+          <p:cNvSpPr/>
+          <p:nvPr/>
+        </p:nvSpPr>
+        <p:spPr>
+          <a:xfrm>
+            <a:off x="4581144" y="3364992"/>
+            <a:ext cx="1225296" cy="475488"/>
           </a:xfrm>
           <a:prstGeom prst="rect">
             <a:avLst>
@@ -20367,14 +20498,14 @@
       </p:sp>
       <p:sp>
         <p:nvSpPr>
-          <p:cNvPr id="32" name="Text 30"/>
-          <p:cNvSpPr/>
-          <p:nvPr/>
-        </p:nvSpPr>
-        <p:spPr>
-          <a:xfrm>
-            <a:off x="6428232" y="3364992"/>
-            <a:ext cx="1645920" cy="475488"/>
+          <p:cNvPr id="35" name="Text 33"/>
+          <p:cNvSpPr/>
+          <p:nvPr/>
+        </p:nvSpPr>
+        <p:spPr>
+          <a:xfrm>
+            <a:off x="4581144" y="3364992"/>
+            <a:ext cx="1225296" cy="475488"/>
           </a:xfrm>
           <a:prstGeom prst="rect">
             <a:avLst/>
@@ -20406,7 +20537,217 @@
       </p:sp>
       <p:sp>
         <p:nvSpPr>
-          <p:cNvPr id="33" name="Shape 31"/>
+          <p:cNvPr id="36" name="Text 34"/>
+          <p:cNvSpPr/>
+          <p:nvPr/>
+        </p:nvSpPr>
+        <p:spPr>
+          <a:xfrm>
+            <a:off x="5806440" y="3364992"/>
+            <a:ext cx="76200" cy="475488"/>
+          </a:xfrm>
+          <a:prstGeom prst="rect">
+            <a:avLst/>
+          </a:prstGeom>
+          <a:noFill/>
+          <a:ln/>
+        </p:spPr>
+        <p:txBody>
+          <a:bodyPr wrap="square" lIns="0" tIns="0" rIns="0" bIns="0" rtlCol="0" anchor="ctr"/>
+          <a:lstStyle/>
+          <a:p>
+            <a:pPr algn="ctr" indent="0" marL="0">
+              <a:buNone/>
+            </a:pPr>
+            <a:r>
+              <a:rPr lang="en-US" sz="1600" b="1" dirty="0">
+                <a:solidFill>
+                  <a:srgbClr val="0D9488"/>
+                </a:solidFill>
+                <a:latin typeface="Trebuchet MS" pitchFamily="34" charset="0"/>
+                <a:ea typeface="Trebuchet MS" pitchFamily="34" charset="-122"/>
+                <a:cs typeface="Trebuchet MS" pitchFamily="34" charset="-120"/>
+              </a:rPr>
+              <a:t>·</a:t>
+            </a:r>
+            <a:endParaRPr lang="en-US" sz="1600" dirty="0"/>
+          </a:p>
+        </p:txBody>
+      </p:sp>
+      <p:sp>
+        <p:nvSpPr>
+          <p:cNvPr id="37" name="Shape 35"/>
+          <p:cNvSpPr/>
+          <p:nvPr/>
+        </p:nvSpPr>
+        <p:spPr>
+          <a:xfrm>
+            <a:off x="5882640" y="3364992"/>
+            <a:ext cx="1225296" cy="475488"/>
+          </a:xfrm>
+          <a:prstGeom prst="rect">
+            <a:avLst>
+              <a:gd name="adj" fmla="val 9615"/>
+            </a:avLst>
+          </a:prstGeom>
+          <a:solidFill>
+            <a:srgbClr val="FFFFFF"/>
+          </a:solidFill>
+          <a:ln w="12700">
+            <a:solidFill>
+              <a:srgbClr val="0D9488"/>
+            </a:solidFill>
+            <a:prstDash val="solid"/>
+          </a:ln>
+        </p:spPr>
+      </p:sp>
+      <p:sp>
+        <p:nvSpPr>
+          <p:cNvPr id="38" name="Text 36"/>
+          <p:cNvSpPr/>
+          <p:nvPr/>
+        </p:nvSpPr>
+        <p:spPr>
+          <a:xfrm>
+            <a:off x="5882640" y="3364992"/>
+            <a:ext cx="1225296" cy="475488"/>
+          </a:xfrm>
+          <a:prstGeom prst="rect">
+            <a:avLst/>
+          </a:prstGeom>
+          <a:noFill/>
+          <a:ln/>
+        </p:spPr>
+        <p:txBody>
+          <a:bodyPr wrap="square" lIns="0" tIns="0" rIns="0" bIns="0" rtlCol="0" anchor="ctr"/>
+          <a:lstStyle/>
+          <a:p>
+            <a:pPr algn="ctr" indent="0" marL="0">
+              <a:buNone/>
+            </a:pPr>
+            <a:r>
+              <a:rPr lang="en-US" sz="1400" b="1" dirty="0">
+                <a:solidFill>
+                  <a:srgbClr val="0D9488"/>
+                </a:solidFill>
+                <a:latin typeface="Trebuchet MS" pitchFamily="34" charset="0"/>
+                <a:ea typeface="Trebuchet MS" pitchFamily="34" charset="-122"/>
+                <a:cs typeface="Trebuchet MS" pitchFamily="34" charset="-120"/>
+              </a:rPr>
+              <a:t>a</a:t>
+            </a:r>
+            <a:endParaRPr lang="en-US" sz="1400" dirty="0"/>
+          </a:p>
+        </p:txBody>
+      </p:sp>
+      <p:sp>
+        <p:nvSpPr>
+          <p:cNvPr id="39" name="Text 37"/>
+          <p:cNvSpPr/>
+          <p:nvPr/>
+        </p:nvSpPr>
+        <p:spPr>
+          <a:xfrm>
+            <a:off x="7107936" y="3364992"/>
+            <a:ext cx="76200" cy="475488"/>
+          </a:xfrm>
+          <a:prstGeom prst="rect">
+            <a:avLst/>
+          </a:prstGeom>
+          <a:noFill/>
+          <a:ln/>
+        </p:spPr>
+        <p:txBody>
+          <a:bodyPr wrap="square" lIns="0" tIns="0" rIns="0" bIns="0" rtlCol="0" anchor="ctr"/>
+          <a:lstStyle/>
+          <a:p>
+            <a:pPr algn="ctr" indent="0" marL="0">
+              <a:buNone/>
+            </a:pPr>
+            <a:r>
+              <a:rPr lang="en-US" sz="1600" b="1" dirty="0">
+                <a:solidFill>
+                  <a:srgbClr val="0D9488"/>
+                </a:solidFill>
+                <a:latin typeface="Trebuchet MS" pitchFamily="34" charset="0"/>
+                <a:ea typeface="Trebuchet MS" pitchFamily="34" charset="-122"/>
+                <a:cs typeface="Trebuchet MS" pitchFamily="34" charset="-120"/>
+              </a:rPr>
+              <a:t>·</a:t>
+            </a:r>
+            <a:endParaRPr lang="en-US" sz="1600" dirty="0"/>
+          </a:p>
+        </p:txBody>
+      </p:sp>
+      <p:sp>
+        <p:nvSpPr>
+          <p:cNvPr id="40" name="Shape 38"/>
+          <p:cNvSpPr/>
+          <p:nvPr/>
+        </p:nvSpPr>
+        <p:spPr>
+          <a:xfrm>
+            <a:off x="7184136" y="3364992"/>
+            <a:ext cx="1225296" cy="475488"/>
+          </a:xfrm>
+          <a:prstGeom prst="rect">
+            <a:avLst>
+              <a:gd name="adj" fmla="val 9615"/>
+            </a:avLst>
+          </a:prstGeom>
+          <a:solidFill>
+            <a:srgbClr val="FFFFFF"/>
+          </a:solidFill>
+          <a:ln w="12700">
+            <a:solidFill>
+              <a:srgbClr val="0D9488"/>
+            </a:solidFill>
+            <a:prstDash val="solid"/>
+          </a:ln>
+        </p:spPr>
+      </p:sp>
+      <p:sp>
+        <p:nvSpPr>
+          <p:cNvPr id="41" name="Text 39"/>
+          <p:cNvSpPr/>
+          <p:nvPr/>
+        </p:nvSpPr>
+        <p:spPr>
+          <a:xfrm>
+            <a:off x="7184136" y="3364992"/>
+            <a:ext cx="1225296" cy="475488"/>
+          </a:xfrm>
+          <a:prstGeom prst="rect">
+            <a:avLst/>
+          </a:prstGeom>
+          <a:noFill/>
+          <a:ln/>
+        </p:spPr>
+        <p:txBody>
+          <a:bodyPr wrap="square" lIns="0" tIns="0" rIns="0" bIns="0" rtlCol="0" anchor="ctr"/>
+          <a:lstStyle/>
+          <a:p>
+            <a:pPr algn="ctr" indent="0" marL="0">
+              <a:buNone/>
+            </a:pPr>
+            <a:r>
+              <a:rPr lang="en-US" sz="1400" b="1" dirty="0">
+                <a:solidFill>
+                  <a:srgbClr val="0D9488"/>
+                </a:solidFill>
+                <a:latin typeface="Trebuchet MS" pitchFamily="34" charset="0"/>
+                <a:ea typeface="Trebuchet MS" pitchFamily="34" charset="-122"/>
+                <a:cs typeface="Trebuchet MS" pitchFamily="34" charset="-120"/>
+              </a:rPr>
+              <a:t>tion</a:t>
+            </a:r>
+            <a:endParaRPr lang="en-US" sz="1400" dirty="0"/>
+          </a:p>
+        </p:txBody>
+      </p:sp>
+      <p:sp>
+        <p:nvSpPr>
+          <p:cNvPr id="42" name="Shape 40"/>
           <p:cNvSpPr/>
           <p:nvPr/>
         </p:nvSpPr>
@@ -20433,7 +20774,7 @@
       </p:sp>
       <p:sp>
         <p:nvSpPr>
-          <p:cNvPr id="34" name="Text 32"/>
+          <p:cNvPr id="43" name="Text 41"/>
           <p:cNvSpPr/>
           <p:nvPr/>
         </p:nvSpPr>
@@ -20472,7 +20813,7 @@
       </p:sp>
       <p:sp>
         <p:nvSpPr>
-          <p:cNvPr id="35" name="Shape 33"/>
+          <p:cNvPr id="44" name="Shape 42"/>
           <p:cNvSpPr/>
           <p:nvPr/>
         </p:nvSpPr>
@@ -20499,7 +20840,7 @@
       </p:sp>
       <p:sp>
         <p:nvSpPr>
-          <p:cNvPr id="36" name="Text 34"/>
+          <p:cNvPr id="45" name="Text 43"/>
           <p:cNvSpPr/>
           <p:nvPr/>
         </p:nvSpPr>
@@ -20961,7 +21302,7 @@
                 <a:ea typeface="Trebuchet MS" pitchFamily="34" charset="-122"/>
                 <a:cs typeface="Trebuchet MS" pitchFamily="34" charset="-120"/>
               </a:rPr>
-              <a:t>consider</a:t>
+              <a:t>consideration</a:t>
             </a:r>
             <a:endParaRPr lang="en-US" sz="2800" dirty="0"/>
           </a:p>
@@ -21041,7 +21382,7 @@
         </p:nvSpPr>
         <p:spPr>
           <a:xfrm>
-            <a:off x="2938272" y="2258568"/>
+            <a:off x="2221992" y="2258568"/>
             <a:ext cx="1828800" cy="292608"/>
           </a:xfrm>
           <a:prstGeom prst="rect">
@@ -21075,7 +21416,7 @@
         </p:nvSpPr>
         <p:spPr>
           <a:xfrm>
-            <a:off x="2938272" y="2258568"/>
+            <a:off x="2221992" y="2258568"/>
             <a:ext cx="1828800" cy="292608"/>
           </a:xfrm>
           <a:prstGeom prst="rect">
@@ -21114,7 +21455,7 @@
         </p:nvSpPr>
         <p:spPr>
           <a:xfrm>
-            <a:off x="2938272" y="2569464"/>
+            <a:off x="2221992" y="2569464"/>
             <a:ext cx="1828800" cy="201168"/>
           </a:xfrm>
           <a:prstGeom prst="rect">
@@ -21153,7 +21494,7 @@
         </p:nvSpPr>
         <p:spPr>
           <a:xfrm>
-            <a:off x="5803392" y="2258568"/>
+            <a:off x="4370832" y="2258568"/>
             <a:ext cx="1828800" cy="292608"/>
           </a:xfrm>
           <a:prstGeom prst="rect">
@@ -21187,7 +21528,7 @@
         </p:nvSpPr>
         <p:spPr>
           <a:xfrm>
-            <a:off x="5803392" y="2258568"/>
+            <a:off x="4370832" y="2258568"/>
             <a:ext cx="1828800" cy="292608"/>
           </a:xfrm>
           <a:prstGeom prst="rect">
@@ -21226,7 +21567,7 @@
         </p:nvSpPr>
         <p:spPr>
           <a:xfrm>
-            <a:off x="5803392" y="2569464"/>
+            <a:off x="4370832" y="2569464"/>
             <a:ext cx="1828800" cy="201168"/>
           </a:xfrm>
           <a:prstGeom prst="rect">
@@ -21251,7 +21592,7 @@
                 <a:ea typeface="Calibri" pitchFamily="34" charset="-122"/>
                 <a:cs typeface="Calibri" pitchFamily="34" charset="-120"/>
               </a:rPr>
-              <a:t>examine, think about</a:t>
+              <a:t>think, observe</a:t>
             </a:r>
             <a:endParaRPr lang="en-US" sz="850" dirty="0"/>
           </a:p>
@@ -21260,6 +21601,118 @@
       <p:sp>
         <p:nvSpPr>
           <p:cNvPr id="22" name="Shape 20"/>
+          <p:cNvSpPr/>
+          <p:nvPr/>
+        </p:nvSpPr>
+        <p:spPr>
+          <a:xfrm>
+            <a:off x="6519672" y="2258568"/>
+            <a:ext cx="1828800" cy="292608"/>
+          </a:xfrm>
+          <a:prstGeom prst="rect">
+            <a:avLst>
+              <a:gd name="adj" fmla="val 25000"/>
+            </a:avLst>
+          </a:prstGeom>
+          <a:solidFill>
+            <a:srgbClr val="FCE7F3"/>
+          </a:solidFill>
+          <a:ln w="19050">
+            <a:solidFill>
+              <a:srgbClr val="DB2777"/>
+            </a:solidFill>
+            <a:prstDash val="solid"/>
+          </a:ln>
+          <a:effectLst>
+            <a:outerShdw sx="100000" sy="100000" kx="0" ky="0" algn="bl" rotWithShape="0" blurRad="101600" dist="38100" dir="8100000">
+              <a:srgbClr val="000000">
+                <a:alpha val="12000"/>
+              </a:srgbClr>
+            </a:outerShdw>
+          </a:effectLst>
+        </p:spPr>
+      </p:sp>
+      <p:sp>
+        <p:nvSpPr>
+          <p:cNvPr id="23" name="Text 21"/>
+          <p:cNvSpPr/>
+          <p:nvPr/>
+        </p:nvSpPr>
+        <p:spPr>
+          <a:xfrm>
+            <a:off x="6519672" y="2258568"/>
+            <a:ext cx="1828800" cy="292608"/>
+          </a:xfrm>
+          <a:prstGeom prst="rect">
+            <a:avLst/>
+          </a:prstGeom>
+          <a:noFill/>
+          <a:ln/>
+        </p:spPr>
+        <p:txBody>
+          <a:bodyPr wrap="square" lIns="0" tIns="0" rIns="0" bIns="0" rtlCol="0" anchor="ctr"/>
+          <a:lstStyle/>
+          <a:p>
+            <a:pPr algn="ctr" indent="0" marL="0">
+              <a:buNone/>
+            </a:pPr>
+            <a:r>
+              <a:rPr lang="en-US" sz="1300" b="1" dirty="0">
+                <a:solidFill>
+                  <a:srgbClr val="9D174D"/>
+                </a:solidFill>
+                <a:latin typeface="Trebuchet MS" pitchFamily="34" charset="0"/>
+                <a:ea typeface="Trebuchet MS" pitchFamily="34" charset="-122"/>
+                <a:cs typeface="Trebuchet MS" pitchFamily="34" charset="-120"/>
+              </a:rPr>
+              <a:t>ation</a:t>
+            </a:r>
+            <a:endParaRPr lang="en-US" sz="1300" dirty="0"/>
+          </a:p>
+        </p:txBody>
+      </p:sp>
+      <p:sp>
+        <p:nvSpPr>
+          <p:cNvPr id="24" name="Text 22"/>
+          <p:cNvSpPr/>
+          <p:nvPr/>
+        </p:nvSpPr>
+        <p:spPr>
+          <a:xfrm>
+            <a:off x="6519672" y="2569464"/>
+            <a:ext cx="1828800" cy="201168"/>
+          </a:xfrm>
+          <a:prstGeom prst="rect">
+            <a:avLst/>
+          </a:prstGeom>
+          <a:noFill/>
+          <a:ln/>
+        </p:spPr>
+        <p:txBody>
+          <a:bodyPr wrap="square" lIns="0" tIns="0" rIns="0" bIns="0" rtlCol="0" anchor="t"/>
+          <a:lstStyle/>
+          <a:p>
+            <a:pPr algn="ctr" indent="0" marL="0">
+              <a:buNone/>
+            </a:pPr>
+            <a:r>
+              <a:rPr lang="en-US" sz="850" dirty="0">
+                <a:solidFill>
+                  <a:srgbClr val="475569"/>
+                </a:solidFill>
+                <a:latin typeface="Calibri" pitchFamily="34" charset="0"/>
+                <a:ea typeface="Calibri" pitchFamily="34" charset="-122"/>
+                <a:cs typeface="Calibri" pitchFamily="34" charset="-120"/>
+              </a:rPr>
+              <a:t>act or process of</a:t>
+            </a:r>
+            <a:endParaRPr lang="en-US" sz="850" dirty="0"/>
+          </a:p>
+        </p:txBody>
+      </p:sp>
+      <p:sp>
+        <p:nvSpPr>
+          <p:cNvPr id="25" name="Shape 23"/>
           <p:cNvSpPr/>
           <p:nvPr/>
         </p:nvSpPr>
@@ -21286,7 +21739,7 @@
       </p:sp>
       <p:sp>
         <p:nvSpPr>
-          <p:cNvPr id="23" name="Text 21"/>
+          <p:cNvPr id="26" name="Text 24"/>
           <p:cNvSpPr/>
           <p:nvPr/>
         </p:nvSpPr>
@@ -21325,7 +21778,7 @@
       </p:sp>
       <p:sp>
         <p:nvSpPr>
-          <p:cNvPr id="24" name="Shape 22"/>
+          <p:cNvPr id="27" name="Shape 25"/>
           <p:cNvSpPr/>
           <p:nvPr/>
         </p:nvSpPr>
@@ -21352,14 +21805,14 @@
       </p:sp>
       <p:sp>
         <p:nvSpPr>
-          <p:cNvPr id="25" name="Shape 23"/>
-          <p:cNvSpPr/>
-          <p:nvPr/>
-        </p:nvSpPr>
-        <p:spPr>
-          <a:xfrm>
-            <a:off x="2313432" y="3364992"/>
-            <a:ext cx="1645920" cy="475488"/>
+          <p:cNvPr id="28" name="Shape 26"/>
+          <p:cNvSpPr/>
+          <p:nvPr/>
+        </p:nvSpPr>
+        <p:spPr>
+          <a:xfrm>
+            <a:off x="1978152" y="3364992"/>
+            <a:ext cx="1225296" cy="475488"/>
           </a:xfrm>
           <a:prstGeom prst="rect">
             <a:avLst>
@@ -21379,14 +21832,14 @@
       </p:sp>
       <p:sp>
         <p:nvSpPr>
-          <p:cNvPr id="26" name="Text 24"/>
-          <p:cNvSpPr/>
-          <p:nvPr/>
-        </p:nvSpPr>
-        <p:spPr>
-          <a:xfrm>
-            <a:off x="2313432" y="3364992"/>
-            <a:ext cx="1645920" cy="475488"/>
+          <p:cNvPr id="29" name="Text 27"/>
+          <p:cNvSpPr/>
+          <p:nvPr/>
+        </p:nvSpPr>
+        <p:spPr>
+          <a:xfrm>
+            <a:off x="1978152" y="3364992"/>
+            <a:ext cx="1225296" cy="475488"/>
           </a:xfrm>
           <a:prstGeom prst="rect">
             <a:avLst/>
@@ -21418,14 +21871,14 @@
       </p:sp>
       <p:sp>
         <p:nvSpPr>
-          <p:cNvPr id="27" name="Text 25"/>
-          <p:cNvSpPr/>
-          <p:nvPr/>
-        </p:nvSpPr>
-        <p:spPr>
-          <a:xfrm>
-            <a:off x="3959352" y="3364992"/>
-            <a:ext cx="411480" cy="475488"/>
+          <p:cNvPr id="30" name="Text 28"/>
+          <p:cNvSpPr/>
+          <p:nvPr/>
+        </p:nvSpPr>
+        <p:spPr>
+          <a:xfrm>
+            <a:off x="3203448" y="3364992"/>
+            <a:ext cx="76200" cy="475488"/>
           </a:xfrm>
           <a:prstGeom prst="rect">
             <a:avLst/>
@@ -21457,14 +21910,14 @@
       </p:sp>
       <p:sp>
         <p:nvSpPr>
-          <p:cNvPr id="28" name="Shape 26"/>
-          <p:cNvSpPr/>
-          <p:nvPr/>
-        </p:nvSpPr>
-        <p:spPr>
-          <a:xfrm>
-            <a:off x="4370832" y="3364992"/>
-            <a:ext cx="1645920" cy="475488"/>
+          <p:cNvPr id="31" name="Shape 29"/>
+          <p:cNvSpPr/>
+          <p:nvPr/>
+        </p:nvSpPr>
+        <p:spPr>
+          <a:xfrm>
+            <a:off x="3279648" y="3364992"/>
+            <a:ext cx="1225296" cy="475488"/>
           </a:xfrm>
           <a:prstGeom prst="rect">
             <a:avLst>
@@ -21484,14 +21937,14 @@
       </p:sp>
       <p:sp>
         <p:nvSpPr>
-          <p:cNvPr id="29" name="Text 27"/>
-          <p:cNvSpPr/>
-          <p:nvPr/>
-        </p:nvSpPr>
-        <p:spPr>
-          <a:xfrm>
-            <a:off x="4370832" y="3364992"/>
-            <a:ext cx="1645920" cy="475488"/>
+          <p:cNvPr id="32" name="Text 30"/>
+          <p:cNvSpPr/>
+          <p:nvPr/>
+        </p:nvSpPr>
+        <p:spPr>
+          <a:xfrm>
+            <a:off x="3279648" y="3364992"/>
+            <a:ext cx="1225296" cy="475488"/>
           </a:xfrm>
           <a:prstGeom prst="rect">
             <a:avLst/>
@@ -21523,14 +21976,14 @@
       </p:sp>
       <p:sp>
         <p:nvSpPr>
-          <p:cNvPr id="30" name="Text 28"/>
-          <p:cNvSpPr/>
-          <p:nvPr/>
-        </p:nvSpPr>
-        <p:spPr>
-          <a:xfrm>
-            <a:off x="6016752" y="3364992"/>
-            <a:ext cx="411480" cy="475488"/>
+          <p:cNvPr id="33" name="Text 31"/>
+          <p:cNvSpPr/>
+          <p:nvPr/>
+        </p:nvSpPr>
+        <p:spPr>
+          <a:xfrm>
+            <a:off x="4504944" y="3364992"/>
+            <a:ext cx="76200" cy="475488"/>
           </a:xfrm>
           <a:prstGeom prst="rect">
             <a:avLst/>
@@ -21562,14 +22015,14 @@
       </p:sp>
       <p:sp>
         <p:nvSpPr>
-          <p:cNvPr id="31" name="Shape 29"/>
-          <p:cNvSpPr/>
-          <p:nvPr/>
-        </p:nvSpPr>
-        <p:spPr>
-          <a:xfrm>
-            <a:off x="6428232" y="3364992"/>
-            <a:ext cx="1645920" cy="475488"/>
+          <p:cNvPr id="34" name="Shape 32"/>
+          <p:cNvSpPr/>
+          <p:nvPr/>
+        </p:nvSpPr>
+        <p:spPr>
+          <a:xfrm>
+            <a:off x="4581144" y="3364992"/>
+            <a:ext cx="1225296" cy="475488"/>
           </a:xfrm>
           <a:prstGeom prst="rect">
             <a:avLst>
@@ -21589,14 +22042,14 @@
       </p:sp>
       <p:sp>
         <p:nvSpPr>
-          <p:cNvPr id="32" name="Text 30"/>
-          <p:cNvSpPr/>
-          <p:nvPr/>
-        </p:nvSpPr>
-        <p:spPr>
-          <a:xfrm>
-            <a:off x="6428232" y="3364992"/>
-            <a:ext cx="1645920" cy="475488"/>
+          <p:cNvPr id="35" name="Text 33"/>
+          <p:cNvSpPr/>
+          <p:nvPr/>
+        </p:nvSpPr>
+        <p:spPr>
+          <a:xfrm>
+            <a:off x="4581144" y="3364992"/>
+            <a:ext cx="1225296" cy="475488"/>
           </a:xfrm>
           <a:prstGeom prst="rect">
             <a:avLst/>
@@ -21628,7 +22081,217 @@
       </p:sp>
       <p:sp>
         <p:nvSpPr>
-          <p:cNvPr id="33" name="Shape 31"/>
+          <p:cNvPr id="36" name="Text 34"/>
+          <p:cNvSpPr/>
+          <p:nvPr/>
+        </p:nvSpPr>
+        <p:spPr>
+          <a:xfrm>
+            <a:off x="5806440" y="3364992"/>
+            <a:ext cx="76200" cy="475488"/>
+          </a:xfrm>
+          <a:prstGeom prst="rect">
+            <a:avLst/>
+          </a:prstGeom>
+          <a:noFill/>
+          <a:ln/>
+        </p:spPr>
+        <p:txBody>
+          <a:bodyPr wrap="square" lIns="0" tIns="0" rIns="0" bIns="0" rtlCol="0" anchor="ctr"/>
+          <a:lstStyle/>
+          <a:p>
+            <a:pPr algn="ctr" indent="0" marL="0">
+              <a:buNone/>
+            </a:pPr>
+            <a:r>
+              <a:rPr lang="en-US" sz="1600" b="1" dirty="0">
+                <a:solidFill>
+                  <a:srgbClr val="0D9488"/>
+                </a:solidFill>
+                <a:latin typeface="Trebuchet MS" pitchFamily="34" charset="0"/>
+                <a:ea typeface="Trebuchet MS" pitchFamily="34" charset="-122"/>
+                <a:cs typeface="Trebuchet MS" pitchFamily="34" charset="-120"/>
+              </a:rPr>
+              <a:t>·</a:t>
+            </a:r>
+            <a:endParaRPr lang="en-US" sz="1600" dirty="0"/>
+          </a:p>
+        </p:txBody>
+      </p:sp>
+      <p:sp>
+        <p:nvSpPr>
+          <p:cNvPr id="37" name="Shape 35"/>
+          <p:cNvSpPr/>
+          <p:nvPr/>
+        </p:nvSpPr>
+        <p:spPr>
+          <a:xfrm>
+            <a:off x="5882640" y="3364992"/>
+            <a:ext cx="1225296" cy="475488"/>
+          </a:xfrm>
+          <a:prstGeom prst="rect">
+            <a:avLst>
+              <a:gd name="adj" fmla="val 9615"/>
+            </a:avLst>
+          </a:prstGeom>
+          <a:solidFill>
+            <a:srgbClr val="FFFFFF"/>
+          </a:solidFill>
+          <a:ln w="12700">
+            <a:solidFill>
+              <a:srgbClr val="0D9488"/>
+            </a:solidFill>
+            <a:prstDash val="solid"/>
+          </a:ln>
+        </p:spPr>
+      </p:sp>
+      <p:sp>
+        <p:nvSpPr>
+          <p:cNvPr id="38" name="Text 36"/>
+          <p:cNvSpPr/>
+          <p:nvPr/>
+        </p:nvSpPr>
+        <p:spPr>
+          <a:xfrm>
+            <a:off x="5882640" y="3364992"/>
+            <a:ext cx="1225296" cy="475488"/>
+          </a:xfrm>
+          <a:prstGeom prst="rect">
+            <a:avLst/>
+          </a:prstGeom>
+          <a:noFill/>
+          <a:ln/>
+        </p:spPr>
+        <p:txBody>
+          <a:bodyPr wrap="square" lIns="0" tIns="0" rIns="0" bIns="0" rtlCol="0" anchor="ctr"/>
+          <a:lstStyle/>
+          <a:p>
+            <a:pPr algn="ctr" indent="0" marL="0">
+              <a:buNone/>
+            </a:pPr>
+            <a:r>
+              <a:rPr lang="en-US" sz="1400" b="1" dirty="0">
+                <a:solidFill>
+                  <a:srgbClr val="0D9488"/>
+                </a:solidFill>
+                <a:latin typeface="Trebuchet MS" pitchFamily="34" charset="0"/>
+                <a:ea typeface="Trebuchet MS" pitchFamily="34" charset="-122"/>
+                <a:cs typeface="Trebuchet MS" pitchFamily="34" charset="-120"/>
+              </a:rPr>
+              <a:t>a</a:t>
+            </a:r>
+            <a:endParaRPr lang="en-US" sz="1400" dirty="0"/>
+          </a:p>
+        </p:txBody>
+      </p:sp>
+      <p:sp>
+        <p:nvSpPr>
+          <p:cNvPr id="39" name="Text 37"/>
+          <p:cNvSpPr/>
+          <p:nvPr/>
+        </p:nvSpPr>
+        <p:spPr>
+          <a:xfrm>
+            <a:off x="7107936" y="3364992"/>
+            <a:ext cx="76200" cy="475488"/>
+          </a:xfrm>
+          <a:prstGeom prst="rect">
+            <a:avLst/>
+          </a:prstGeom>
+          <a:noFill/>
+          <a:ln/>
+        </p:spPr>
+        <p:txBody>
+          <a:bodyPr wrap="square" lIns="0" tIns="0" rIns="0" bIns="0" rtlCol="0" anchor="ctr"/>
+          <a:lstStyle/>
+          <a:p>
+            <a:pPr algn="ctr" indent="0" marL="0">
+              <a:buNone/>
+            </a:pPr>
+            <a:r>
+              <a:rPr lang="en-US" sz="1600" b="1" dirty="0">
+                <a:solidFill>
+                  <a:srgbClr val="0D9488"/>
+                </a:solidFill>
+                <a:latin typeface="Trebuchet MS" pitchFamily="34" charset="0"/>
+                <a:ea typeface="Trebuchet MS" pitchFamily="34" charset="-122"/>
+                <a:cs typeface="Trebuchet MS" pitchFamily="34" charset="-120"/>
+              </a:rPr>
+              <a:t>·</a:t>
+            </a:r>
+            <a:endParaRPr lang="en-US" sz="1600" dirty="0"/>
+          </a:p>
+        </p:txBody>
+      </p:sp>
+      <p:sp>
+        <p:nvSpPr>
+          <p:cNvPr id="40" name="Shape 38"/>
+          <p:cNvSpPr/>
+          <p:nvPr/>
+        </p:nvSpPr>
+        <p:spPr>
+          <a:xfrm>
+            <a:off x="7184136" y="3364992"/>
+            <a:ext cx="1225296" cy="475488"/>
+          </a:xfrm>
+          <a:prstGeom prst="rect">
+            <a:avLst>
+              <a:gd name="adj" fmla="val 9615"/>
+            </a:avLst>
+          </a:prstGeom>
+          <a:solidFill>
+            <a:srgbClr val="FFFFFF"/>
+          </a:solidFill>
+          <a:ln w="12700">
+            <a:solidFill>
+              <a:srgbClr val="0D9488"/>
+            </a:solidFill>
+            <a:prstDash val="solid"/>
+          </a:ln>
+        </p:spPr>
+      </p:sp>
+      <p:sp>
+        <p:nvSpPr>
+          <p:cNvPr id="41" name="Text 39"/>
+          <p:cNvSpPr/>
+          <p:nvPr/>
+        </p:nvSpPr>
+        <p:spPr>
+          <a:xfrm>
+            <a:off x="7184136" y="3364992"/>
+            <a:ext cx="1225296" cy="475488"/>
+          </a:xfrm>
+          <a:prstGeom prst="rect">
+            <a:avLst/>
+          </a:prstGeom>
+          <a:noFill/>
+          <a:ln/>
+        </p:spPr>
+        <p:txBody>
+          <a:bodyPr wrap="square" lIns="0" tIns="0" rIns="0" bIns="0" rtlCol="0" anchor="ctr"/>
+          <a:lstStyle/>
+          <a:p>
+            <a:pPr algn="ctr" indent="0" marL="0">
+              <a:buNone/>
+            </a:pPr>
+            <a:r>
+              <a:rPr lang="en-US" sz="1400" b="1" dirty="0">
+                <a:solidFill>
+                  <a:srgbClr val="0D9488"/>
+                </a:solidFill>
+                <a:latin typeface="Trebuchet MS" pitchFamily="34" charset="0"/>
+                <a:ea typeface="Trebuchet MS" pitchFamily="34" charset="-122"/>
+                <a:cs typeface="Trebuchet MS" pitchFamily="34" charset="-120"/>
+              </a:rPr>
+              <a:t>tion</a:t>
+            </a:r>
+            <a:endParaRPr lang="en-US" sz="1400" dirty="0"/>
+          </a:p>
+        </p:txBody>
+      </p:sp>
+      <p:sp>
+        <p:nvSpPr>
+          <p:cNvPr id="42" name="Shape 40"/>
           <p:cNvSpPr/>
           <p:nvPr/>
         </p:nvSpPr>
@@ -21655,7 +22318,7 @@
       </p:sp>
       <p:sp>
         <p:nvSpPr>
-          <p:cNvPr id="34" name="Text 32"/>
+          <p:cNvPr id="43" name="Text 41"/>
           <p:cNvSpPr/>
           <p:nvPr/>
         </p:nvSpPr>
@@ -21694,18 +22357,18 @@
       </p:sp>
       <p:sp>
         <p:nvSpPr>
-          <p:cNvPr id="35" name="Shape 33"/>
+          <p:cNvPr id="44" name="Shape 42"/>
           <p:cNvSpPr/>
           <p:nvPr/>
         </p:nvSpPr>
         <p:spPr>
           <a:xfrm>
             <a:off x="1874520" y="4096512"/>
-            <a:ext cx="6903720" cy="658368"/>
+            <a:ext cx="6903720" cy="804672"/>
           </a:xfrm>
           <a:prstGeom prst="rect">
             <a:avLst>
-              <a:gd name="adj" fmla="val 8333"/>
+              <a:gd name="adj" fmla="val 6818"/>
             </a:avLst>
           </a:prstGeom>
           <a:solidFill>
@@ -21721,18 +22384,18 @@
       </p:sp>
       <p:sp>
         <p:nvSpPr>
-          <p:cNvPr id="36" name="Shape 34"/>
-          <p:cNvSpPr/>
-          <p:nvPr/>
-        </p:nvSpPr>
-        <p:spPr>
-          <a:xfrm>
-            <a:off x="2124837" y="4169664"/>
-            <a:ext cx="685800" cy="475488"/>
+          <p:cNvPr id="45" name="Shape 43"/>
+          <p:cNvSpPr/>
+          <p:nvPr/>
+        </p:nvSpPr>
+        <p:spPr>
+          <a:xfrm>
+            <a:off x="1952244" y="4169664"/>
+            <a:ext cx="543652" cy="384048"/>
           </a:xfrm>
           <a:prstGeom prst="rect">
             <a:avLst>
-              <a:gd name="adj" fmla="val 7692"/>
+              <a:gd name="adj" fmla="val 9524"/>
             </a:avLst>
           </a:prstGeom>
           <a:solidFill>
@@ -21748,14 +22411,14 @@
       </p:sp>
       <p:sp>
         <p:nvSpPr>
-          <p:cNvPr id="37" name="Text 35"/>
-          <p:cNvSpPr/>
-          <p:nvPr/>
-        </p:nvSpPr>
-        <p:spPr>
-          <a:xfrm>
-            <a:off x="2124837" y="4169664"/>
-            <a:ext cx="685800" cy="475488"/>
+          <p:cNvPr id="46" name="Text 44"/>
+          <p:cNvSpPr/>
+          <p:nvPr/>
+        </p:nvSpPr>
+        <p:spPr>
+          <a:xfrm>
+            <a:off x="1952244" y="4169664"/>
+            <a:ext cx="543652" cy="384048"/>
           </a:xfrm>
           <a:prstGeom prst="rect">
             <a:avLst/>
@@ -21787,18 +22450,18 @@
       </p:sp>
       <p:sp>
         <p:nvSpPr>
-          <p:cNvPr id="38" name="Shape 36"/>
-          <p:cNvSpPr/>
-          <p:nvPr/>
-        </p:nvSpPr>
-        <p:spPr>
-          <a:xfrm>
-            <a:off x="3033522" y="4169664"/>
-            <a:ext cx="685800" cy="475488"/>
+          <p:cNvPr id="47" name="Shape 45"/>
+          <p:cNvSpPr/>
+          <p:nvPr/>
+        </p:nvSpPr>
+        <p:spPr>
+          <a:xfrm>
+            <a:off x="2546188" y="4169664"/>
+            <a:ext cx="543652" cy="384048"/>
           </a:xfrm>
           <a:prstGeom prst="rect">
             <a:avLst>
-              <a:gd name="adj" fmla="val 7692"/>
+              <a:gd name="adj" fmla="val 9524"/>
             </a:avLst>
           </a:prstGeom>
           <a:solidFill>
@@ -21814,14 +22477,14 @@
       </p:sp>
       <p:sp>
         <p:nvSpPr>
-          <p:cNvPr id="39" name="Text 37"/>
-          <p:cNvSpPr/>
-          <p:nvPr/>
-        </p:nvSpPr>
-        <p:spPr>
-          <a:xfrm>
-            <a:off x="3033522" y="4169664"/>
-            <a:ext cx="685800" cy="475488"/>
+          <p:cNvPr id="48" name="Text 46"/>
+          <p:cNvSpPr/>
+          <p:nvPr/>
+        </p:nvSpPr>
+        <p:spPr>
+          <a:xfrm>
+            <a:off x="2546188" y="4169664"/>
+            <a:ext cx="543652" cy="384048"/>
           </a:xfrm>
           <a:prstGeom prst="rect">
             <a:avLst/>
@@ -21853,18 +22516,18 @@
       </p:sp>
       <p:sp>
         <p:nvSpPr>
-          <p:cNvPr id="40" name="Shape 38"/>
-          <p:cNvSpPr/>
-          <p:nvPr/>
-        </p:nvSpPr>
-        <p:spPr>
-          <a:xfrm>
-            <a:off x="3942207" y="4169664"/>
-            <a:ext cx="685800" cy="475488"/>
+          <p:cNvPr id="49" name="Shape 47"/>
+          <p:cNvSpPr/>
+          <p:nvPr/>
+        </p:nvSpPr>
+        <p:spPr>
+          <a:xfrm>
+            <a:off x="3140133" y="4169664"/>
+            <a:ext cx="543652" cy="384048"/>
           </a:xfrm>
           <a:prstGeom prst="rect">
             <a:avLst>
-              <a:gd name="adj" fmla="val 7692"/>
+              <a:gd name="adj" fmla="val 9524"/>
             </a:avLst>
           </a:prstGeom>
           <a:solidFill>
@@ -21880,14 +22543,14 @@
       </p:sp>
       <p:sp>
         <p:nvSpPr>
-          <p:cNvPr id="41" name="Text 39"/>
-          <p:cNvSpPr/>
-          <p:nvPr/>
-        </p:nvSpPr>
-        <p:spPr>
-          <a:xfrm>
-            <a:off x="3942207" y="4169664"/>
-            <a:ext cx="685800" cy="475488"/>
+          <p:cNvPr id="50" name="Text 48"/>
+          <p:cNvSpPr/>
+          <p:nvPr/>
+        </p:nvSpPr>
+        <p:spPr>
+          <a:xfrm>
+            <a:off x="3140133" y="4169664"/>
+            <a:ext cx="543652" cy="384048"/>
           </a:xfrm>
           <a:prstGeom prst="rect">
             <a:avLst/>
@@ -21919,18 +22582,18 @@
       </p:sp>
       <p:sp>
         <p:nvSpPr>
-          <p:cNvPr id="42" name="Shape 40"/>
-          <p:cNvSpPr/>
-          <p:nvPr/>
-        </p:nvSpPr>
-        <p:spPr>
-          <a:xfrm>
-            <a:off x="4850892" y="4169664"/>
-            <a:ext cx="685800" cy="475488"/>
+          <p:cNvPr id="51" name="Shape 49"/>
+          <p:cNvSpPr/>
+          <p:nvPr/>
+        </p:nvSpPr>
+        <p:spPr>
+          <a:xfrm>
+            <a:off x="3734077" y="4169664"/>
+            <a:ext cx="543652" cy="384048"/>
           </a:xfrm>
           <a:prstGeom prst="rect">
             <a:avLst>
-              <a:gd name="adj" fmla="val 7692"/>
+              <a:gd name="adj" fmla="val 9524"/>
             </a:avLst>
           </a:prstGeom>
           <a:solidFill>
@@ -21946,14 +22609,14 @@
       </p:sp>
       <p:sp>
         <p:nvSpPr>
-          <p:cNvPr id="43" name="Text 41"/>
-          <p:cNvSpPr/>
-          <p:nvPr/>
-        </p:nvSpPr>
-        <p:spPr>
-          <a:xfrm>
-            <a:off x="4850892" y="4169664"/>
-            <a:ext cx="685800" cy="475488"/>
+          <p:cNvPr id="52" name="Text 50"/>
+          <p:cNvSpPr/>
+          <p:nvPr/>
+        </p:nvSpPr>
+        <p:spPr>
+          <a:xfrm>
+            <a:off x="3734077" y="4169664"/>
+            <a:ext cx="543652" cy="384048"/>
           </a:xfrm>
           <a:prstGeom prst="rect">
             <a:avLst/>
@@ -21985,18 +22648,18 @@
       </p:sp>
       <p:sp>
         <p:nvSpPr>
-          <p:cNvPr id="44" name="Shape 42"/>
-          <p:cNvSpPr/>
-          <p:nvPr/>
-        </p:nvSpPr>
-        <p:spPr>
-          <a:xfrm>
-            <a:off x="5759577" y="4169664"/>
-            <a:ext cx="685800" cy="475488"/>
+          <p:cNvPr id="53" name="Shape 51"/>
+          <p:cNvSpPr/>
+          <p:nvPr/>
+        </p:nvSpPr>
+        <p:spPr>
+          <a:xfrm>
+            <a:off x="4328021" y="4169664"/>
+            <a:ext cx="543652" cy="384048"/>
           </a:xfrm>
           <a:prstGeom prst="rect">
             <a:avLst>
-              <a:gd name="adj" fmla="val 7692"/>
+              <a:gd name="adj" fmla="val 9524"/>
             </a:avLst>
           </a:prstGeom>
           <a:solidFill>
@@ -22012,14 +22675,14 @@
       </p:sp>
       <p:sp>
         <p:nvSpPr>
-          <p:cNvPr id="45" name="Text 43"/>
-          <p:cNvSpPr/>
-          <p:nvPr/>
-        </p:nvSpPr>
-        <p:spPr>
-          <a:xfrm>
-            <a:off x="5759577" y="4169664"/>
-            <a:ext cx="685800" cy="475488"/>
+          <p:cNvPr id="54" name="Text 52"/>
+          <p:cNvSpPr/>
+          <p:nvPr/>
+        </p:nvSpPr>
+        <p:spPr>
+          <a:xfrm>
+            <a:off x="4328021" y="4169664"/>
+            <a:ext cx="543652" cy="384048"/>
           </a:xfrm>
           <a:prstGeom prst="rect">
             <a:avLst/>
@@ -22051,18 +22714,18 @@
       </p:sp>
       <p:sp>
         <p:nvSpPr>
-          <p:cNvPr id="46" name="Shape 44"/>
-          <p:cNvSpPr/>
-          <p:nvPr/>
-        </p:nvSpPr>
-        <p:spPr>
-          <a:xfrm>
-            <a:off x="6668262" y="4169664"/>
-            <a:ext cx="685800" cy="475488"/>
+          <p:cNvPr id="55" name="Shape 53"/>
+          <p:cNvSpPr/>
+          <p:nvPr/>
+        </p:nvSpPr>
+        <p:spPr>
+          <a:xfrm>
+            <a:off x="4921966" y="4169664"/>
+            <a:ext cx="543652" cy="384048"/>
           </a:xfrm>
           <a:prstGeom prst="rect">
             <a:avLst>
-              <a:gd name="adj" fmla="val 7692"/>
+              <a:gd name="adj" fmla="val 9524"/>
             </a:avLst>
           </a:prstGeom>
           <a:solidFill>
@@ -22078,14 +22741,14 @@
       </p:sp>
       <p:sp>
         <p:nvSpPr>
-          <p:cNvPr id="47" name="Text 45"/>
-          <p:cNvSpPr/>
-          <p:nvPr/>
-        </p:nvSpPr>
-        <p:spPr>
-          <a:xfrm>
-            <a:off x="6668262" y="4169664"/>
-            <a:ext cx="685800" cy="475488"/>
+          <p:cNvPr id="56" name="Text 54"/>
+          <p:cNvSpPr/>
+          <p:nvPr/>
+        </p:nvSpPr>
+        <p:spPr>
+          <a:xfrm>
+            <a:off x="4921966" y="4169664"/>
+            <a:ext cx="543652" cy="384048"/>
           </a:xfrm>
           <a:prstGeom prst="rect">
             <a:avLst/>
@@ -22117,18 +22780,18 @@
       </p:sp>
       <p:sp>
         <p:nvSpPr>
-          <p:cNvPr id="48" name="Shape 46"/>
-          <p:cNvSpPr/>
-          <p:nvPr/>
-        </p:nvSpPr>
-        <p:spPr>
-          <a:xfrm>
-            <a:off x="7576947" y="4169664"/>
-            <a:ext cx="685800" cy="475488"/>
+          <p:cNvPr id="57" name="Shape 55"/>
+          <p:cNvSpPr/>
+          <p:nvPr/>
+        </p:nvSpPr>
+        <p:spPr>
+          <a:xfrm>
+            <a:off x="5515910" y="4169664"/>
+            <a:ext cx="543652" cy="384048"/>
           </a:xfrm>
           <a:prstGeom prst="rect">
             <a:avLst>
-              <a:gd name="adj" fmla="val 7692"/>
+              <a:gd name="adj" fmla="val 9524"/>
             </a:avLst>
           </a:prstGeom>
           <a:solidFill>
@@ -22144,14 +22807,14 @@
       </p:sp>
       <p:sp>
         <p:nvSpPr>
-          <p:cNvPr id="49" name="Text 47"/>
-          <p:cNvSpPr/>
-          <p:nvPr/>
-        </p:nvSpPr>
-        <p:spPr>
-          <a:xfrm>
-            <a:off x="7576947" y="4169664"/>
-            <a:ext cx="685800" cy="475488"/>
+          <p:cNvPr id="58" name="Text 56"/>
+          <p:cNvSpPr/>
+          <p:nvPr/>
+        </p:nvSpPr>
+        <p:spPr>
+          <a:xfrm>
+            <a:off x="5515910" y="4169664"/>
+            <a:ext cx="543652" cy="384048"/>
           </a:xfrm>
           <a:prstGeom prst="rect">
             <a:avLst/>
@@ -22176,6 +22839,309 @@
                 <a:cs typeface="Trebuchet MS" pitchFamily="34" charset="-120"/>
               </a:rPr>
               <a:t>er</a:t>
+            </a:r>
+            <a:endParaRPr lang="en-US" sz="900" dirty="0"/>
+          </a:p>
+        </p:txBody>
+      </p:sp>
+      <p:sp>
+        <p:nvSpPr>
+          <p:cNvPr id="59" name="Shape 57"/>
+          <p:cNvSpPr/>
+          <p:nvPr/>
+        </p:nvSpPr>
+        <p:spPr>
+          <a:xfrm>
+            <a:off x="6109855" y="4169664"/>
+            <a:ext cx="543652" cy="384048"/>
+          </a:xfrm>
+          <a:prstGeom prst="rect">
+            <a:avLst>
+              <a:gd name="adj" fmla="val 9524"/>
+            </a:avLst>
+          </a:prstGeom>
+          <a:solidFill>
+            <a:srgbClr val="FFFFFF"/>
+          </a:solidFill>
+          <a:ln w="12700">
+            <a:solidFill>
+              <a:srgbClr val="DB2777"/>
+            </a:solidFill>
+            <a:prstDash val="solid"/>
+          </a:ln>
+        </p:spPr>
+      </p:sp>
+      <p:sp>
+        <p:nvSpPr>
+          <p:cNvPr id="60" name="Text 58"/>
+          <p:cNvSpPr/>
+          <p:nvPr/>
+        </p:nvSpPr>
+        <p:spPr>
+          <a:xfrm>
+            <a:off x="6109855" y="4169664"/>
+            <a:ext cx="543652" cy="384048"/>
+          </a:xfrm>
+          <a:prstGeom prst="rect">
+            <a:avLst/>
+          </a:prstGeom>
+          <a:noFill/>
+          <a:ln/>
+        </p:spPr>
+        <p:txBody>
+          <a:bodyPr wrap="square" lIns="0" tIns="0" rIns="0" bIns="0" rtlCol="0" anchor="ctr"/>
+          <a:lstStyle/>
+          <a:p>
+            <a:pPr algn="ctr" indent="0" marL="0">
+              <a:buNone/>
+            </a:pPr>
+            <a:r>
+              <a:rPr lang="en-US" sz="900" b="1" dirty="0">
+                <a:solidFill>
+                  <a:srgbClr val="9D174D"/>
+                </a:solidFill>
+                <a:latin typeface="Trebuchet MS" pitchFamily="34" charset="0"/>
+                <a:ea typeface="Trebuchet MS" pitchFamily="34" charset="-122"/>
+                <a:cs typeface="Trebuchet MS" pitchFamily="34" charset="-120"/>
+              </a:rPr>
+              <a:t>a</a:t>
+            </a:r>
+            <a:endParaRPr lang="en-US" sz="900" dirty="0"/>
+          </a:p>
+        </p:txBody>
+      </p:sp>
+      <p:sp>
+        <p:nvSpPr>
+          <p:cNvPr id="61" name="Shape 59"/>
+          <p:cNvSpPr/>
+          <p:nvPr/>
+        </p:nvSpPr>
+        <p:spPr>
+          <a:xfrm>
+            <a:off x="6703799" y="4169664"/>
+            <a:ext cx="543652" cy="384048"/>
+          </a:xfrm>
+          <a:prstGeom prst="rect">
+            <a:avLst>
+              <a:gd name="adj" fmla="val 9524"/>
+            </a:avLst>
+          </a:prstGeom>
+          <a:solidFill>
+            <a:srgbClr val="FFFFFF"/>
+          </a:solidFill>
+          <a:ln w="12700">
+            <a:solidFill>
+              <a:srgbClr val="DB2777"/>
+            </a:solidFill>
+            <a:prstDash val="solid"/>
+          </a:ln>
+        </p:spPr>
+      </p:sp>
+      <p:sp>
+        <p:nvSpPr>
+          <p:cNvPr id="62" name="Text 60"/>
+          <p:cNvSpPr/>
+          <p:nvPr/>
+        </p:nvSpPr>
+        <p:spPr>
+          <a:xfrm>
+            <a:off x="6703799" y="4169664"/>
+            <a:ext cx="543652" cy="384048"/>
+          </a:xfrm>
+          <a:prstGeom prst="rect">
+            <a:avLst/>
+          </a:prstGeom>
+          <a:noFill/>
+          <a:ln/>
+        </p:spPr>
+        <p:txBody>
+          <a:bodyPr wrap="square" lIns="0" tIns="0" rIns="0" bIns="0" rtlCol="0" anchor="ctr"/>
+          <a:lstStyle/>
+          <a:p>
+            <a:pPr algn="ctr" indent="0" marL="0">
+              <a:buNone/>
+            </a:pPr>
+            <a:r>
+              <a:rPr lang="en-US" sz="900" b="1" dirty="0">
+                <a:solidFill>
+                  <a:srgbClr val="9D174D"/>
+                </a:solidFill>
+                <a:latin typeface="Trebuchet MS" pitchFamily="34" charset="0"/>
+                <a:ea typeface="Trebuchet MS" pitchFamily="34" charset="-122"/>
+                <a:cs typeface="Trebuchet MS" pitchFamily="34" charset="-120"/>
+              </a:rPr>
+              <a:t>ti</a:t>
+            </a:r>
+            <a:endParaRPr lang="en-US" sz="900" dirty="0"/>
+          </a:p>
+        </p:txBody>
+      </p:sp>
+      <p:sp>
+        <p:nvSpPr>
+          <p:cNvPr id="63" name="Text 61"/>
+          <p:cNvSpPr/>
+          <p:nvPr/>
+        </p:nvSpPr>
+        <p:spPr>
+          <a:xfrm>
+            <a:off x="6703799" y="4572000"/>
+            <a:ext cx="543652" cy="219456"/>
+          </a:xfrm>
+          <a:prstGeom prst="rect">
+            <a:avLst/>
+          </a:prstGeom>
+          <a:noFill/>
+          <a:ln/>
+        </p:spPr>
+        <p:txBody>
+          <a:bodyPr wrap="square" lIns="0" tIns="0" rIns="0" bIns="0" rtlCol="0" anchor="t"/>
+          <a:lstStyle/>
+          <a:p>
+            <a:pPr algn="ctr" indent="0" marL="0">
+              <a:buNone/>
+            </a:pPr>
+            <a:r>
+              <a:rPr lang="en-US" sz="750" i="1" dirty="0">
+                <a:solidFill>
+                  <a:srgbClr val="94A3B8"/>
+                </a:solidFill>
+                <a:latin typeface="Calibri" pitchFamily="34" charset="0"/>
+                <a:ea typeface="Calibri" pitchFamily="34" charset="-122"/>
+                <a:cs typeface="Calibri" pitchFamily="34" charset="-120"/>
+              </a:rPr>
+              <a:t>/sh/</a:t>
+            </a:r>
+            <a:endParaRPr lang="en-US" sz="750" dirty="0"/>
+          </a:p>
+        </p:txBody>
+      </p:sp>
+      <p:sp>
+        <p:nvSpPr>
+          <p:cNvPr id="64" name="Shape 62"/>
+          <p:cNvSpPr/>
+          <p:nvPr/>
+        </p:nvSpPr>
+        <p:spPr>
+          <a:xfrm>
+            <a:off x="7297743" y="4169664"/>
+            <a:ext cx="543652" cy="384048"/>
+          </a:xfrm>
+          <a:prstGeom prst="rect">
+            <a:avLst>
+              <a:gd name="adj" fmla="val 9524"/>
+            </a:avLst>
+          </a:prstGeom>
+          <a:solidFill>
+            <a:srgbClr val="FFFFFF"/>
+          </a:solidFill>
+          <a:ln w="12700">
+            <a:solidFill>
+              <a:srgbClr val="DB2777"/>
+            </a:solidFill>
+            <a:prstDash val="solid"/>
+          </a:ln>
+        </p:spPr>
+      </p:sp>
+      <p:sp>
+        <p:nvSpPr>
+          <p:cNvPr id="65" name="Text 63"/>
+          <p:cNvSpPr/>
+          <p:nvPr/>
+        </p:nvSpPr>
+        <p:spPr>
+          <a:xfrm>
+            <a:off x="7297743" y="4169664"/>
+            <a:ext cx="543652" cy="384048"/>
+          </a:xfrm>
+          <a:prstGeom prst="rect">
+            <a:avLst/>
+          </a:prstGeom>
+          <a:noFill/>
+          <a:ln/>
+        </p:spPr>
+        <p:txBody>
+          <a:bodyPr wrap="square" lIns="0" tIns="0" rIns="0" bIns="0" rtlCol="0" anchor="ctr"/>
+          <a:lstStyle/>
+          <a:p>
+            <a:pPr algn="ctr" indent="0" marL="0">
+              <a:buNone/>
+            </a:pPr>
+            <a:r>
+              <a:rPr lang="en-US" sz="900" b="1" dirty="0">
+                <a:solidFill>
+                  <a:srgbClr val="9D174D"/>
+                </a:solidFill>
+                <a:latin typeface="Trebuchet MS" pitchFamily="34" charset="0"/>
+                <a:ea typeface="Trebuchet MS" pitchFamily="34" charset="-122"/>
+                <a:cs typeface="Trebuchet MS" pitchFamily="34" charset="-120"/>
+              </a:rPr>
+              <a:t>o</a:t>
+            </a:r>
+            <a:endParaRPr lang="en-US" sz="900" dirty="0"/>
+          </a:p>
+        </p:txBody>
+      </p:sp>
+      <p:sp>
+        <p:nvSpPr>
+          <p:cNvPr id="66" name="Shape 64"/>
+          <p:cNvSpPr/>
+          <p:nvPr/>
+        </p:nvSpPr>
+        <p:spPr>
+          <a:xfrm>
+            <a:off x="7891688" y="4169664"/>
+            <a:ext cx="543652" cy="384048"/>
+          </a:xfrm>
+          <a:prstGeom prst="rect">
+            <a:avLst>
+              <a:gd name="adj" fmla="val 9524"/>
+            </a:avLst>
+          </a:prstGeom>
+          <a:solidFill>
+            <a:srgbClr val="FFFFFF"/>
+          </a:solidFill>
+          <a:ln w="12700">
+            <a:solidFill>
+              <a:srgbClr val="DB2777"/>
+            </a:solidFill>
+            <a:prstDash val="solid"/>
+          </a:ln>
+        </p:spPr>
+      </p:sp>
+      <p:sp>
+        <p:nvSpPr>
+          <p:cNvPr id="67" name="Text 65"/>
+          <p:cNvSpPr/>
+          <p:nvPr/>
+        </p:nvSpPr>
+        <p:spPr>
+          <a:xfrm>
+            <a:off x="7891688" y="4169664"/>
+            <a:ext cx="543652" cy="384048"/>
+          </a:xfrm>
+          <a:prstGeom prst="rect">
+            <a:avLst/>
+          </a:prstGeom>
+          <a:noFill/>
+          <a:ln/>
+        </p:spPr>
+        <p:txBody>
+          <a:bodyPr wrap="square" lIns="0" tIns="0" rIns="0" bIns="0" rtlCol="0" anchor="ctr"/>
+          <a:lstStyle/>
+          <a:p>
+            <a:pPr algn="ctr" indent="0" marL="0">
+              <a:buNone/>
+            </a:pPr>
+            <a:r>
+              <a:rPr lang="en-US" sz="900" b="1" dirty="0">
+                <a:solidFill>
+                  <a:srgbClr val="9D174D"/>
+                </a:solidFill>
+                <a:latin typeface="Trebuchet MS" pitchFamily="34" charset="0"/>
+                <a:ea typeface="Trebuchet MS" pitchFamily="34" charset="-122"/>
+                <a:cs typeface="Trebuchet MS" pitchFamily="34" charset="-120"/>
+              </a:rPr>
+              <a:t>n</a:t>
             </a:r>
             <a:endParaRPr lang="en-US" sz="900" dirty="0"/>
           </a:p>
@@ -22606,7 +23572,7 @@
                 <a:ea typeface="Trebuchet MS" pitchFamily="34" charset="-122"/>
                 <a:cs typeface="Trebuchet MS" pitchFamily="34" charset="-120"/>
               </a:rPr>
-              <a:t>connect</a:t>
+              <a:t>construct</a:t>
             </a:r>
             <a:endParaRPr lang="en-US" sz="2800" dirty="0"/>
           </a:p>
@@ -23433,7 +24399,7 @@
                 <a:ea typeface="Trebuchet MS" pitchFamily="34" charset="-122"/>
                 <a:cs typeface="Trebuchet MS" pitchFamily="34" charset="-120"/>
               </a:rPr>
-              <a:t>connect</a:t>
+              <a:t>construct</a:t>
             </a:r>
             <a:endParaRPr lang="en-US" sz="2800" dirty="0"/>
           </a:p>
@@ -23684,7 +24650,7 @@
                 <a:ea typeface="Trebuchet MS" pitchFamily="34" charset="-122"/>
                 <a:cs typeface="Trebuchet MS" pitchFamily="34" charset="-120"/>
               </a:rPr>
-              <a:t>nect</a:t>
+              <a:t>struct</a:t>
             </a:r>
             <a:endParaRPr lang="en-US" sz="1300" dirty="0"/>
           </a:p>
@@ -23723,7 +24689,7 @@
                 <a:ea typeface="Calibri" pitchFamily="34" charset="-122"/>
                 <a:cs typeface="Calibri" pitchFamily="34" charset="-120"/>
               </a:rPr>
-              <a:t>bind, tie</a:t>
+              <a:t>build</a:t>
             </a:r>
             <a:endParaRPr lang="en-US" sz="850" dirty="0"/>
           </a:p>
@@ -25137,7 +26103,7 @@
                 <a:ea typeface="Trebuchet MS" pitchFamily="34" charset="-122"/>
                 <a:cs typeface="Trebuchet MS" pitchFamily="34" charset="-120"/>
               </a:rPr>
-              <a:t>connect</a:t>
+              <a:t>construct</a:t>
             </a:r>
             <a:endParaRPr lang="en-US" sz="2800" dirty="0"/>
           </a:p>
@@ -25388,7 +26354,7 @@
                 <a:ea typeface="Trebuchet MS" pitchFamily="34" charset="-122"/>
                 <a:cs typeface="Trebuchet MS" pitchFamily="34" charset="-120"/>
               </a:rPr>
-              <a:t>nect</a:t>
+              <a:t>struct</a:t>
             </a:r>
             <a:endParaRPr lang="en-US" sz="1300" dirty="0"/>
           </a:p>
@@ -25427,7 +26393,7 @@
                 <a:ea typeface="Calibri" pitchFamily="34" charset="-122"/>
                 <a:cs typeface="Calibri" pitchFamily="34" charset="-120"/>
               </a:rPr>
-              <a:t>bind, tie</a:t>
+              <a:t>build</a:t>
             </a:r>
             <a:endParaRPr lang="en-US" sz="850" dirty="0"/>
           </a:p>
@@ -25691,7 +26657,7 @@
                 <a:ea typeface="Trebuchet MS" pitchFamily="34" charset="-122"/>
                 <a:cs typeface="Trebuchet MS" pitchFamily="34" charset="-120"/>
               </a:rPr>
-              <a:t>nect</a:t>
+              <a:t>struct</a:t>
             </a:r>
             <a:endParaRPr lang="en-US" sz="1400" dirty="0"/>
           </a:p>
@@ -26254,7 +27220,7 @@
                 <a:ea typeface="Trebuchet MS" pitchFamily="34" charset="-122"/>
                 <a:cs typeface="Trebuchet MS" pitchFamily="34" charset="-120"/>
               </a:rPr>
-              <a:t>connect</a:t>
+              <a:t>construct</a:t>
             </a:r>
             <a:endParaRPr lang="en-US" sz="2800" dirty="0"/>
           </a:p>
@@ -26505,7 +27471,7 @@
                 <a:ea typeface="Trebuchet MS" pitchFamily="34" charset="-122"/>
                 <a:cs typeface="Trebuchet MS" pitchFamily="34" charset="-120"/>
               </a:rPr>
-              <a:t>nect</a:t>
+              <a:t>struct</a:t>
             </a:r>
             <a:endParaRPr lang="en-US" sz="1300" dirty="0"/>
           </a:p>
@@ -26544,7 +27510,7 @@
                 <a:ea typeface="Calibri" pitchFamily="34" charset="-122"/>
                 <a:cs typeface="Calibri" pitchFamily="34" charset="-120"/>
               </a:rPr>
-              <a:t>bind, tie</a:t>
+              <a:t>build</a:t>
             </a:r>
             <a:endParaRPr lang="en-US" sz="850" dirty="0"/>
           </a:p>
@@ -26808,7 +27774,7 @@
                 <a:ea typeface="Trebuchet MS" pitchFamily="34" charset="-122"/>
                 <a:cs typeface="Trebuchet MS" pitchFamily="34" charset="-120"/>
               </a:rPr>
-              <a:t>nect</a:t>
+              <a:t>struct</a:t>
             </a:r>
             <a:endParaRPr lang="en-US" sz="1400" dirty="0"/>
           </a:p>
@@ -26915,8 +27881,8 @@
         </p:nvSpPr>
         <p:spPr>
           <a:xfrm>
-            <a:off x="2427732" y="4169664"/>
-            <a:ext cx="685800" cy="475488"/>
+            <a:off x="1951330" y="4169664"/>
+            <a:ext cx="676656" cy="475488"/>
           </a:xfrm>
           <a:prstGeom prst="rect">
             <a:avLst>
@@ -26942,8 +27908,8 @@
         </p:nvSpPr>
         <p:spPr>
           <a:xfrm>
-            <a:off x="2427732" y="4169664"/>
-            <a:ext cx="685800" cy="475488"/>
+            <a:off x="1951330" y="4169664"/>
+            <a:ext cx="676656" cy="475488"/>
           </a:xfrm>
           <a:prstGeom prst="rect">
             <a:avLst/>
@@ -26981,8 +27947,8 @@
         </p:nvSpPr>
         <p:spPr>
           <a:xfrm>
-            <a:off x="3639312" y="4169664"/>
-            <a:ext cx="685800" cy="475488"/>
+            <a:off x="2677363" y="4169664"/>
+            <a:ext cx="676656" cy="475488"/>
           </a:xfrm>
           <a:prstGeom prst="rect">
             <a:avLst>
@@ -27008,8 +27974,8 @@
         </p:nvSpPr>
         <p:spPr>
           <a:xfrm>
-            <a:off x="3639312" y="4169664"/>
-            <a:ext cx="685800" cy="475488"/>
+            <a:off x="2677363" y="4169664"/>
+            <a:ext cx="676656" cy="475488"/>
           </a:xfrm>
           <a:prstGeom prst="rect">
             <a:avLst/>
@@ -27047,8 +28013,8 @@
         </p:nvSpPr>
         <p:spPr>
           <a:xfrm>
-            <a:off x="4850892" y="4169664"/>
-            <a:ext cx="685800" cy="475488"/>
+            <a:off x="3403397" y="4169664"/>
+            <a:ext cx="676656" cy="475488"/>
           </a:xfrm>
           <a:prstGeom prst="rect">
             <a:avLst>
@@ -27074,8 +28040,8 @@
         </p:nvSpPr>
         <p:spPr>
           <a:xfrm>
-            <a:off x="4850892" y="4169664"/>
-            <a:ext cx="685800" cy="475488"/>
+            <a:off x="3403397" y="4169664"/>
+            <a:ext cx="676656" cy="475488"/>
           </a:xfrm>
           <a:prstGeom prst="rect">
             <a:avLst/>
@@ -27099,7 +28065,7 @@
                 <a:ea typeface="Trebuchet MS" pitchFamily="34" charset="-122"/>
                 <a:cs typeface="Trebuchet MS" pitchFamily="34" charset="-120"/>
               </a:rPr>
-              <a:t>nn</a:t>
+              <a:t>n</a:t>
             </a:r>
             <a:endParaRPr lang="en-US" sz="900" dirty="0"/>
           </a:p>
@@ -27113,8 +28079,8 @@
         </p:nvSpPr>
         <p:spPr>
           <a:xfrm>
-            <a:off x="6062472" y="4169664"/>
-            <a:ext cx="685800" cy="475488"/>
+            <a:off x="4129430" y="4169664"/>
+            <a:ext cx="676656" cy="475488"/>
           </a:xfrm>
           <a:prstGeom prst="rect">
             <a:avLst>
@@ -27140,8 +28106,8 @@
         </p:nvSpPr>
         <p:spPr>
           <a:xfrm>
-            <a:off x="6062472" y="4169664"/>
-            <a:ext cx="685800" cy="475488"/>
+            <a:off x="4129430" y="4169664"/>
+            <a:ext cx="676656" cy="475488"/>
           </a:xfrm>
           <a:prstGeom prst="rect">
             <a:avLst/>
@@ -27165,7 +28131,7 @@
                 <a:ea typeface="Trebuchet MS" pitchFamily="34" charset="-122"/>
                 <a:cs typeface="Trebuchet MS" pitchFamily="34" charset="-120"/>
               </a:rPr>
-              <a:t>e</a:t>
+              <a:t>s</a:t>
             </a:r>
             <a:endParaRPr lang="en-US" sz="900" dirty="0"/>
           </a:p>
@@ -27179,8 +28145,8 @@
         </p:nvSpPr>
         <p:spPr>
           <a:xfrm>
-            <a:off x="7274052" y="4169664"/>
-            <a:ext cx="685800" cy="475488"/>
+            <a:off x="4855464" y="4169664"/>
+            <a:ext cx="676656" cy="475488"/>
           </a:xfrm>
           <a:prstGeom prst="rect">
             <a:avLst>
@@ -27206,8 +28172,8 @@
         </p:nvSpPr>
         <p:spPr>
           <a:xfrm>
-            <a:off x="7274052" y="4169664"/>
-            <a:ext cx="685800" cy="475488"/>
+            <a:off x="4855464" y="4169664"/>
+            <a:ext cx="676656" cy="475488"/>
           </a:xfrm>
           <a:prstGeom prst="rect">
             <a:avLst/>
@@ -27231,7 +28197,271 @@
                 <a:ea typeface="Trebuchet MS" pitchFamily="34" charset="-122"/>
                 <a:cs typeface="Trebuchet MS" pitchFamily="34" charset="-120"/>
               </a:rPr>
-              <a:t>ct</a:t>
+              <a:t>t</a:t>
+            </a:r>
+            <a:endParaRPr lang="en-US" sz="900" dirty="0"/>
+          </a:p>
+        </p:txBody>
+      </p:sp>
+      <p:sp>
+        <p:nvSpPr>
+          <p:cNvPr id="43" name="Shape 41"/>
+          <p:cNvSpPr/>
+          <p:nvPr/>
+        </p:nvSpPr>
+        <p:spPr>
+          <a:xfrm>
+            <a:off x="5581498" y="4169664"/>
+            <a:ext cx="676656" cy="475488"/>
+          </a:xfrm>
+          <a:prstGeom prst="rect">
+            <a:avLst>
+              <a:gd name="adj" fmla="val 7692"/>
+            </a:avLst>
+          </a:prstGeom>
+          <a:solidFill>
+            <a:srgbClr val="FFFFFF"/>
+          </a:solidFill>
+          <a:ln w="12700">
+            <a:solidFill>
+              <a:srgbClr val="DB2777"/>
+            </a:solidFill>
+            <a:prstDash val="solid"/>
+          </a:ln>
+        </p:spPr>
+      </p:sp>
+      <p:sp>
+        <p:nvSpPr>
+          <p:cNvPr id="44" name="Text 42"/>
+          <p:cNvSpPr/>
+          <p:nvPr/>
+        </p:nvSpPr>
+        <p:spPr>
+          <a:xfrm>
+            <a:off x="5581498" y="4169664"/>
+            <a:ext cx="676656" cy="475488"/>
+          </a:xfrm>
+          <a:prstGeom prst="rect">
+            <a:avLst/>
+          </a:prstGeom>
+          <a:noFill/>
+          <a:ln/>
+        </p:spPr>
+        <p:txBody>
+          <a:bodyPr wrap="square" lIns="0" tIns="0" rIns="0" bIns="0" rtlCol="0" anchor="ctr"/>
+          <a:lstStyle/>
+          <a:p>
+            <a:pPr algn="ctr" indent="0" marL="0">
+              <a:buNone/>
+            </a:pPr>
+            <a:r>
+              <a:rPr lang="en-US" sz="900" b="1" dirty="0">
+                <a:solidFill>
+                  <a:srgbClr val="9D174D"/>
+                </a:solidFill>
+                <a:latin typeface="Trebuchet MS" pitchFamily="34" charset="0"/>
+                <a:ea typeface="Trebuchet MS" pitchFamily="34" charset="-122"/>
+                <a:cs typeface="Trebuchet MS" pitchFamily="34" charset="-120"/>
+              </a:rPr>
+              <a:t>r</a:t>
+            </a:r>
+            <a:endParaRPr lang="en-US" sz="900" dirty="0"/>
+          </a:p>
+        </p:txBody>
+      </p:sp>
+      <p:sp>
+        <p:nvSpPr>
+          <p:cNvPr id="45" name="Shape 43"/>
+          <p:cNvSpPr/>
+          <p:nvPr/>
+        </p:nvSpPr>
+        <p:spPr>
+          <a:xfrm>
+            <a:off x="6307531" y="4169664"/>
+            <a:ext cx="676656" cy="475488"/>
+          </a:xfrm>
+          <a:prstGeom prst="rect">
+            <a:avLst>
+              <a:gd name="adj" fmla="val 7692"/>
+            </a:avLst>
+          </a:prstGeom>
+          <a:solidFill>
+            <a:srgbClr val="FFFFFF"/>
+          </a:solidFill>
+          <a:ln w="12700">
+            <a:solidFill>
+              <a:srgbClr val="DB2777"/>
+            </a:solidFill>
+            <a:prstDash val="solid"/>
+          </a:ln>
+        </p:spPr>
+      </p:sp>
+      <p:sp>
+        <p:nvSpPr>
+          <p:cNvPr id="46" name="Text 44"/>
+          <p:cNvSpPr/>
+          <p:nvPr/>
+        </p:nvSpPr>
+        <p:spPr>
+          <a:xfrm>
+            <a:off x="6307531" y="4169664"/>
+            <a:ext cx="676656" cy="475488"/>
+          </a:xfrm>
+          <a:prstGeom prst="rect">
+            <a:avLst/>
+          </a:prstGeom>
+          <a:noFill/>
+          <a:ln/>
+        </p:spPr>
+        <p:txBody>
+          <a:bodyPr wrap="square" lIns="0" tIns="0" rIns="0" bIns="0" rtlCol="0" anchor="ctr"/>
+          <a:lstStyle/>
+          <a:p>
+            <a:pPr algn="ctr" indent="0" marL="0">
+              <a:buNone/>
+            </a:pPr>
+            <a:r>
+              <a:rPr lang="en-US" sz="900" b="1" dirty="0">
+                <a:solidFill>
+                  <a:srgbClr val="9D174D"/>
+                </a:solidFill>
+                <a:latin typeface="Trebuchet MS" pitchFamily="34" charset="0"/>
+                <a:ea typeface="Trebuchet MS" pitchFamily="34" charset="-122"/>
+                <a:cs typeface="Trebuchet MS" pitchFamily="34" charset="-120"/>
+              </a:rPr>
+              <a:t>u</a:t>
+            </a:r>
+            <a:endParaRPr lang="en-US" sz="900" dirty="0"/>
+          </a:p>
+        </p:txBody>
+      </p:sp>
+      <p:sp>
+        <p:nvSpPr>
+          <p:cNvPr id="47" name="Shape 45"/>
+          <p:cNvSpPr/>
+          <p:nvPr/>
+        </p:nvSpPr>
+        <p:spPr>
+          <a:xfrm>
+            <a:off x="7033565" y="4169664"/>
+            <a:ext cx="676656" cy="475488"/>
+          </a:xfrm>
+          <a:prstGeom prst="rect">
+            <a:avLst>
+              <a:gd name="adj" fmla="val 7692"/>
+            </a:avLst>
+          </a:prstGeom>
+          <a:solidFill>
+            <a:srgbClr val="FFFFFF"/>
+          </a:solidFill>
+          <a:ln w="12700">
+            <a:solidFill>
+              <a:srgbClr val="DB2777"/>
+            </a:solidFill>
+            <a:prstDash val="solid"/>
+          </a:ln>
+        </p:spPr>
+      </p:sp>
+      <p:sp>
+        <p:nvSpPr>
+          <p:cNvPr id="48" name="Text 46"/>
+          <p:cNvSpPr/>
+          <p:nvPr/>
+        </p:nvSpPr>
+        <p:spPr>
+          <a:xfrm>
+            <a:off x="7033565" y="4169664"/>
+            <a:ext cx="676656" cy="475488"/>
+          </a:xfrm>
+          <a:prstGeom prst="rect">
+            <a:avLst/>
+          </a:prstGeom>
+          <a:noFill/>
+          <a:ln/>
+        </p:spPr>
+        <p:txBody>
+          <a:bodyPr wrap="square" lIns="0" tIns="0" rIns="0" bIns="0" rtlCol="0" anchor="ctr"/>
+          <a:lstStyle/>
+          <a:p>
+            <a:pPr algn="ctr" indent="0" marL="0">
+              <a:buNone/>
+            </a:pPr>
+            <a:r>
+              <a:rPr lang="en-US" sz="900" b="1" dirty="0">
+                <a:solidFill>
+                  <a:srgbClr val="9D174D"/>
+                </a:solidFill>
+                <a:latin typeface="Trebuchet MS" pitchFamily="34" charset="0"/>
+                <a:ea typeface="Trebuchet MS" pitchFamily="34" charset="-122"/>
+                <a:cs typeface="Trebuchet MS" pitchFamily="34" charset="-120"/>
+              </a:rPr>
+              <a:t>c</a:t>
+            </a:r>
+            <a:endParaRPr lang="en-US" sz="900" dirty="0"/>
+          </a:p>
+        </p:txBody>
+      </p:sp>
+      <p:sp>
+        <p:nvSpPr>
+          <p:cNvPr id="49" name="Shape 47"/>
+          <p:cNvSpPr/>
+          <p:nvPr/>
+        </p:nvSpPr>
+        <p:spPr>
+          <a:xfrm>
+            <a:off x="7759598" y="4169664"/>
+            <a:ext cx="676656" cy="475488"/>
+          </a:xfrm>
+          <a:prstGeom prst="rect">
+            <a:avLst>
+              <a:gd name="adj" fmla="val 7692"/>
+            </a:avLst>
+          </a:prstGeom>
+          <a:solidFill>
+            <a:srgbClr val="FFFFFF"/>
+          </a:solidFill>
+          <a:ln w="12700">
+            <a:solidFill>
+              <a:srgbClr val="DB2777"/>
+            </a:solidFill>
+            <a:prstDash val="solid"/>
+          </a:ln>
+        </p:spPr>
+      </p:sp>
+      <p:sp>
+        <p:nvSpPr>
+          <p:cNvPr id="50" name="Text 48"/>
+          <p:cNvSpPr/>
+          <p:nvPr/>
+        </p:nvSpPr>
+        <p:spPr>
+          <a:xfrm>
+            <a:off x="7759598" y="4169664"/>
+            <a:ext cx="676656" cy="475488"/>
+          </a:xfrm>
+          <a:prstGeom prst="rect">
+            <a:avLst/>
+          </a:prstGeom>
+          <a:noFill/>
+          <a:ln/>
+        </p:spPr>
+        <p:txBody>
+          <a:bodyPr wrap="square" lIns="0" tIns="0" rIns="0" bIns="0" rtlCol="0" anchor="ctr"/>
+          <a:lstStyle/>
+          <a:p>
+            <a:pPr algn="ctr" indent="0" marL="0">
+              <a:buNone/>
+            </a:pPr>
+            <a:r>
+              <a:rPr lang="en-US" sz="900" b="1" dirty="0">
+                <a:solidFill>
+                  <a:srgbClr val="9D174D"/>
+                </a:solidFill>
+                <a:latin typeface="Trebuchet MS" pitchFamily="34" charset="0"/>
+                <a:ea typeface="Trebuchet MS" pitchFamily="34" charset="-122"/>
+                <a:cs typeface="Trebuchet MS" pitchFamily="34" charset="-120"/>
+              </a:rPr>
+              <a:t>t</a:t>
             </a:r>
             <a:endParaRPr lang="en-US" sz="900" dirty="0"/>
           </a:p>
@@ -27662,7 +28892,7 @@
                 <a:ea typeface="Trebuchet MS" pitchFamily="34" charset="-122"/>
                 <a:cs typeface="Trebuchet MS" pitchFamily="34" charset="-120"/>
               </a:rPr>
-              <a:t>conclude</a:t>
+              <a:t>contribute</a:t>
             </a:r>
             <a:endParaRPr lang="en-US" sz="2800" dirty="0"/>
           </a:p>
@@ -28489,7 +29719,7 @@
                 <a:ea typeface="Trebuchet MS" pitchFamily="34" charset="-122"/>
                 <a:cs typeface="Trebuchet MS" pitchFamily="34" charset="-120"/>
               </a:rPr>
-              <a:t>conclude</a:t>
+              <a:t>contribute</a:t>
             </a:r>
             <a:endParaRPr lang="en-US" sz="2800" dirty="0"/>
           </a:p>
@@ -28569,7 +29799,7 @@
         </p:nvSpPr>
         <p:spPr>
           <a:xfrm>
-            <a:off x="2938272" y="2258568"/>
+            <a:off x="2221992" y="2258568"/>
             <a:ext cx="1828800" cy="292608"/>
           </a:xfrm>
           <a:prstGeom prst="rect">
@@ -28603,7 +29833,7 @@
         </p:nvSpPr>
         <p:spPr>
           <a:xfrm>
-            <a:off x="2938272" y="2258568"/>
+            <a:off x="2221992" y="2258568"/>
             <a:ext cx="1828800" cy="292608"/>
           </a:xfrm>
           <a:prstGeom prst="rect">
@@ -28642,7 +29872,7 @@
         </p:nvSpPr>
         <p:spPr>
           <a:xfrm>
-            <a:off x="2938272" y="2569464"/>
+            <a:off x="2221992" y="2569464"/>
             <a:ext cx="1828800" cy="201168"/>
           </a:xfrm>
           <a:prstGeom prst="rect">
@@ -28681,7 +29911,7 @@
         </p:nvSpPr>
         <p:spPr>
           <a:xfrm>
-            <a:off x="5803392" y="2258568"/>
+            <a:off x="4370832" y="2258568"/>
             <a:ext cx="1828800" cy="292608"/>
           </a:xfrm>
           <a:prstGeom prst="rect">
@@ -28715,7 +29945,7 @@
         </p:nvSpPr>
         <p:spPr>
           <a:xfrm>
-            <a:off x="5803392" y="2258568"/>
+            <a:off x="4370832" y="2258568"/>
             <a:ext cx="1828800" cy="292608"/>
           </a:xfrm>
           <a:prstGeom prst="rect">
@@ -28740,7 +29970,7 @@
                 <a:ea typeface="Trebuchet MS" pitchFamily="34" charset="-122"/>
                 <a:cs typeface="Trebuchet MS" pitchFamily="34" charset="-120"/>
               </a:rPr>
-              <a:t>clude</a:t>
+              <a:t>tribut</a:t>
             </a:r>
             <a:endParaRPr lang="en-US" sz="1300" dirty="0"/>
           </a:p>
@@ -28754,7 +29984,7 @@
         </p:nvSpPr>
         <p:spPr>
           <a:xfrm>
-            <a:off x="5803392" y="2569464"/>
+            <a:off x="4370832" y="2569464"/>
             <a:ext cx="1828800" cy="201168"/>
           </a:xfrm>
           <a:prstGeom prst="rect">
@@ -28779,7 +30009,7 @@
                 <a:ea typeface="Calibri" pitchFamily="34" charset="-122"/>
                 <a:cs typeface="Calibri" pitchFamily="34" charset="-120"/>
               </a:rPr>
-              <a:t>close, shut</a:t>
+              <a:t>give</a:t>
             </a:r>
             <a:endParaRPr lang="en-US" sz="850" dirty="0"/>
           </a:p>
@@ -28788,6 +30018,118 @@
       <p:sp>
         <p:nvSpPr>
           <p:cNvPr id="22" name="Shape 20"/>
+          <p:cNvSpPr/>
+          <p:nvPr/>
+        </p:nvSpPr>
+        <p:spPr>
+          <a:xfrm>
+            <a:off x="6519672" y="2258568"/>
+            <a:ext cx="1828800" cy="292608"/>
+          </a:xfrm>
+          <a:prstGeom prst="rect">
+            <a:avLst>
+              <a:gd name="adj" fmla="val 25000"/>
+            </a:avLst>
+          </a:prstGeom>
+          <a:solidFill>
+            <a:srgbClr val="FCE7F3"/>
+          </a:solidFill>
+          <a:ln w="19050">
+            <a:solidFill>
+              <a:srgbClr val="DB2777"/>
+            </a:solidFill>
+            <a:prstDash val="solid"/>
+          </a:ln>
+          <a:effectLst>
+            <a:outerShdw sx="100000" sy="100000" kx="0" ky="0" algn="bl" rotWithShape="0" blurRad="101600" dist="38100" dir="8100000">
+              <a:srgbClr val="000000">
+                <a:alpha val="12000"/>
+              </a:srgbClr>
+            </a:outerShdw>
+          </a:effectLst>
+        </p:spPr>
+      </p:sp>
+      <p:sp>
+        <p:nvSpPr>
+          <p:cNvPr id="23" name="Text 21"/>
+          <p:cNvSpPr/>
+          <p:nvPr/>
+        </p:nvSpPr>
+        <p:spPr>
+          <a:xfrm>
+            <a:off x="6519672" y="2258568"/>
+            <a:ext cx="1828800" cy="292608"/>
+          </a:xfrm>
+          <a:prstGeom prst="rect">
+            <a:avLst/>
+          </a:prstGeom>
+          <a:noFill/>
+          <a:ln/>
+        </p:spPr>
+        <p:txBody>
+          <a:bodyPr wrap="square" lIns="0" tIns="0" rIns="0" bIns="0" rtlCol="0" anchor="ctr"/>
+          <a:lstStyle/>
+          <a:p>
+            <a:pPr algn="ctr" indent="0" marL="0">
+              <a:buNone/>
+            </a:pPr>
+            <a:r>
+              <a:rPr lang="en-US" sz="1300" b="1" dirty="0">
+                <a:solidFill>
+                  <a:srgbClr val="9D174D"/>
+                </a:solidFill>
+                <a:latin typeface="Trebuchet MS" pitchFamily="34" charset="0"/>
+                <a:ea typeface="Trebuchet MS" pitchFamily="34" charset="-122"/>
+                <a:cs typeface="Trebuchet MS" pitchFamily="34" charset="-120"/>
+              </a:rPr>
+              <a:t>e</a:t>
+            </a:r>
+            <a:endParaRPr lang="en-US" sz="1300" dirty="0"/>
+          </a:p>
+        </p:txBody>
+      </p:sp>
+      <p:sp>
+        <p:nvSpPr>
+          <p:cNvPr id="24" name="Text 22"/>
+          <p:cNvSpPr/>
+          <p:nvPr/>
+        </p:nvSpPr>
+        <p:spPr>
+          <a:xfrm>
+            <a:off x="6519672" y="2569464"/>
+            <a:ext cx="1828800" cy="201168"/>
+          </a:xfrm>
+          <a:prstGeom prst="rect">
+            <a:avLst/>
+          </a:prstGeom>
+          <a:noFill/>
+          <a:ln/>
+        </p:spPr>
+        <p:txBody>
+          <a:bodyPr wrap="square" lIns="0" tIns="0" rIns="0" bIns="0" rtlCol="0" anchor="t"/>
+          <a:lstStyle/>
+          <a:p>
+            <a:pPr algn="ctr" indent="0" marL="0">
+              <a:buNone/>
+            </a:pPr>
+            <a:r>
+              <a:rPr lang="en-US" sz="850" dirty="0">
+                <a:solidFill>
+                  <a:srgbClr val="475569"/>
+                </a:solidFill>
+                <a:latin typeface="Calibri" pitchFamily="34" charset="0"/>
+                <a:ea typeface="Calibri" pitchFamily="34" charset="-122"/>
+                <a:cs typeface="Calibri" pitchFamily="34" charset="-120"/>
+              </a:rPr>
+              <a:t>silent e</a:t>
+            </a:r>
+            <a:endParaRPr lang="en-US" sz="850" dirty="0"/>
+          </a:p>
+        </p:txBody>
+      </p:sp>
+      <p:sp>
+        <p:nvSpPr>
+          <p:cNvPr id="25" name="Shape 23"/>
           <p:cNvSpPr/>
           <p:nvPr/>
         </p:nvSpPr>
@@ -28814,7 +30156,7 @@
       </p:sp>
       <p:sp>
         <p:nvSpPr>
-          <p:cNvPr id="23" name="Text 21"/>
+          <p:cNvPr id="26" name="Text 24"/>
           <p:cNvSpPr/>
           <p:nvPr/>
         </p:nvSpPr>
@@ -28853,7 +30195,7 @@
       </p:sp>
       <p:sp>
         <p:nvSpPr>
-          <p:cNvPr id="24" name="Shape 22"/>
+          <p:cNvPr id="27" name="Shape 25"/>
           <p:cNvSpPr/>
           <p:nvPr/>
         </p:nvSpPr>
@@ -28880,7 +30222,7 @@
       </p:sp>
       <p:sp>
         <p:nvSpPr>
-          <p:cNvPr id="25" name="Text 23"/>
+          <p:cNvPr id="28" name="Text 26"/>
           <p:cNvSpPr/>
           <p:nvPr/>
         </p:nvSpPr>
@@ -28919,7 +30261,7 @@
       </p:sp>
       <p:sp>
         <p:nvSpPr>
-          <p:cNvPr id="26" name="Shape 24"/>
+          <p:cNvPr id="29" name="Shape 27"/>
           <p:cNvSpPr/>
           <p:nvPr/>
         </p:nvSpPr>
@@ -28946,7 +30288,7 @@
       </p:sp>
       <p:sp>
         <p:nvSpPr>
-          <p:cNvPr id="27" name="Text 25"/>
+          <p:cNvPr id="30" name="Text 28"/>
           <p:cNvSpPr/>
           <p:nvPr/>
         </p:nvSpPr>
@@ -28985,7 +30327,7 @@
       </p:sp>
       <p:sp>
         <p:nvSpPr>
-          <p:cNvPr id="28" name="Shape 26"/>
+          <p:cNvPr id="31" name="Shape 29"/>
           <p:cNvSpPr/>
           <p:nvPr/>
         </p:nvSpPr>
@@ -29012,7 +30354,7 @@
       </p:sp>
       <p:sp>
         <p:nvSpPr>
-          <p:cNvPr id="29" name="Text 27"/>
+          <p:cNvPr id="32" name="Text 30"/>
           <p:cNvSpPr/>
           <p:nvPr/>
         </p:nvSpPr>
@@ -29474,7 +30816,7 @@
                 <a:ea typeface="Trebuchet MS" pitchFamily="34" charset="-122"/>
                 <a:cs typeface="Trebuchet MS" pitchFamily="34" charset="-120"/>
               </a:rPr>
-              <a:t>conclude</a:t>
+              <a:t>contribute</a:t>
             </a:r>
             <a:endParaRPr lang="en-US" sz="2800" dirty="0"/>
           </a:p>
@@ -29554,7 +30896,7 @@
         </p:nvSpPr>
         <p:spPr>
           <a:xfrm>
-            <a:off x="2938272" y="2258568"/>
+            <a:off x="2221992" y="2258568"/>
             <a:ext cx="1828800" cy="292608"/>
           </a:xfrm>
           <a:prstGeom prst="rect">
@@ -29588,7 +30930,7 @@
         </p:nvSpPr>
         <p:spPr>
           <a:xfrm>
-            <a:off x="2938272" y="2258568"/>
+            <a:off x="2221992" y="2258568"/>
             <a:ext cx="1828800" cy="292608"/>
           </a:xfrm>
           <a:prstGeom prst="rect">
@@ -29627,7 +30969,7 @@
         </p:nvSpPr>
         <p:spPr>
           <a:xfrm>
-            <a:off x="2938272" y="2569464"/>
+            <a:off x="2221992" y="2569464"/>
             <a:ext cx="1828800" cy="201168"/>
           </a:xfrm>
           <a:prstGeom prst="rect">
@@ -29666,7 +31008,7 @@
         </p:nvSpPr>
         <p:spPr>
           <a:xfrm>
-            <a:off x="5803392" y="2258568"/>
+            <a:off x="4370832" y="2258568"/>
             <a:ext cx="1828800" cy="292608"/>
           </a:xfrm>
           <a:prstGeom prst="rect">
@@ -29700,7 +31042,7 @@
         </p:nvSpPr>
         <p:spPr>
           <a:xfrm>
-            <a:off x="5803392" y="2258568"/>
+            <a:off x="4370832" y="2258568"/>
             <a:ext cx="1828800" cy="292608"/>
           </a:xfrm>
           <a:prstGeom prst="rect">
@@ -29725,7 +31067,7 @@
                 <a:ea typeface="Trebuchet MS" pitchFamily="34" charset="-122"/>
                 <a:cs typeface="Trebuchet MS" pitchFamily="34" charset="-120"/>
               </a:rPr>
-              <a:t>clude</a:t>
+              <a:t>tribut</a:t>
             </a:r>
             <a:endParaRPr lang="en-US" sz="1300" dirty="0"/>
           </a:p>
@@ -29739,7 +31081,7 @@
         </p:nvSpPr>
         <p:spPr>
           <a:xfrm>
-            <a:off x="5803392" y="2569464"/>
+            <a:off x="4370832" y="2569464"/>
             <a:ext cx="1828800" cy="201168"/>
           </a:xfrm>
           <a:prstGeom prst="rect">
@@ -29764,7 +31106,7 @@
                 <a:ea typeface="Calibri" pitchFamily="34" charset="-122"/>
                 <a:cs typeface="Calibri" pitchFamily="34" charset="-120"/>
               </a:rPr>
-              <a:t>close, shut</a:t>
+              <a:t>give</a:t>
             </a:r>
             <a:endParaRPr lang="en-US" sz="850" dirty="0"/>
           </a:p>
@@ -29773,6 +31115,118 @@
       <p:sp>
         <p:nvSpPr>
           <p:cNvPr id="22" name="Shape 20"/>
+          <p:cNvSpPr/>
+          <p:nvPr/>
+        </p:nvSpPr>
+        <p:spPr>
+          <a:xfrm>
+            <a:off x="6519672" y="2258568"/>
+            <a:ext cx="1828800" cy="292608"/>
+          </a:xfrm>
+          <a:prstGeom prst="rect">
+            <a:avLst>
+              <a:gd name="adj" fmla="val 25000"/>
+            </a:avLst>
+          </a:prstGeom>
+          <a:solidFill>
+            <a:srgbClr val="FCE7F3"/>
+          </a:solidFill>
+          <a:ln w="19050">
+            <a:solidFill>
+              <a:srgbClr val="DB2777"/>
+            </a:solidFill>
+            <a:prstDash val="solid"/>
+          </a:ln>
+          <a:effectLst>
+            <a:outerShdw sx="100000" sy="100000" kx="0" ky="0" algn="bl" rotWithShape="0" blurRad="101600" dist="38100" dir="8100000">
+              <a:srgbClr val="000000">
+                <a:alpha val="12000"/>
+              </a:srgbClr>
+            </a:outerShdw>
+          </a:effectLst>
+        </p:spPr>
+      </p:sp>
+      <p:sp>
+        <p:nvSpPr>
+          <p:cNvPr id="23" name="Text 21"/>
+          <p:cNvSpPr/>
+          <p:nvPr/>
+        </p:nvSpPr>
+        <p:spPr>
+          <a:xfrm>
+            <a:off x="6519672" y="2258568"/>
+            <a:ext cx="1828800" cy="292608"/>
+          </a:xfrm>
+          <a:prstGeom prst="rect">
+            <a:avLst/>
+          </a:prstGeom>
+          <a:noFill/>
+          <a:ln/>
+        </p:spPr>
+        <p:txBody>
+          <a:bodyPr wrap="square" lIns="0" tIns="0" rIns="0" bIns="0" rtlCol="0" anchor="ctr"/>
+          <a:lstStyle/>
+          <a:p>
+            <a:pPr algn="ctr" indent="0" marL="0">
+              <a:buNone/>
+            </a:pPr>
+            <a:r>
+              <a:rPr lang="en-US" sz="1300" b="1" dirty="0">
+                <a:solidFill>
+                  <a:srgbClr val="9D174D"/>
+                </a:solidFill>
+                <a:latin typeface="Trebuchet MS" pitchFamily="34" charset="0"/>
+                <a:ea typeface="Trebuchet MS" pitchFamily="34" charset="-122"/>
+                <a:cs typeface="Trebuchet MS" pitchFamily="34" charset="-120"/>
+              </a:rPr>
+              <a:t>e</a:t>
+            </a:r>
+            <a:endParaRPr lang="en-US" sz="1300" dirty="0"/>
+          </a:p>
+        </p:txBody>
+      </p:sp>
+      <p:sp>
+        <p:nvSpPr>
+          <p:cNvPr id="24" name="Text 22"/>
+          <p:cNvSpPr/>
+          <p:nvPr/>
+        </p:nvSpPr>
+        <p:spPr>
+          <a:xfrm>
+            <a:off x="6519672" y="2569464"/>
+            <a:ext cx="1828800" cy="201168"/>
+          </a:xfrm>
+          <a:prstGeom prst="rect">
+            <a:avLst/>
+          </a:prstGeom>
+          <a:noFill/>
+          <a:ln/>
+        </p:spPr>
+        <p:txBody>
+          <a:bodyPr wrap="square" lIns="0" tIns="0" rIns="0" bIns="0" rtlCol="0" anchor="t"/>
+          <a:lstStyle/>
+          <a:p>
+            <a:pPr algn="ctr" indent="0" marL="0">
+              <a:buNone/>
+            </a:pPr>
+            <a:r>
+              <a:rPr lang="en-US" sz="850" dirty="0">
+                <a:solidFill>
+                  <a:srgbClr val="475569"/>
+                </a:solidFill>
+                <a:latin typeface="Calibri" pitchFamily="34" charset="0"/>
+                <a:ea typeface="Calibri" pitchFamily="34" charset="-122"/>
+                <a:cs typeface="Calibri" pitchFamily="34" charset="-120"/>
+              </a:rPr>
+              <a:t>silent e</a:t>
+            </a:r>
+            <a:endParaRPr lang="en-US" sz="850" dirty="0"/>
+          </a:p>
+        </p:txBody>
+      </p:sp>
+      <p:sp>
+        <p:nvSpPr>
+          <p:cNvPr id="25" name="Shape 23"/>
           <p:cNvSpPr/>
           <p:nvPr/>
         </p:nvSpPr>
@@ -29799,7 +31253,7 @@
       </p:sp>
       <p:sp>
         <p:nvSpPr>
-          <p:cNvPr id="23" name="Text 21"/>
+          <p:cNvPr id="26" name="Text 24"/>
           <p:cNvSpPr/>
           <p:nvPr/>
         </p:nvSpPr>
@@ -29838,7 +31292,7 @@
       </p:sp>
       <p:sp>
         <p:nvSpPr>
-          <p:cNvPr id="24" name="Shape 22"/>
+          <p:cNvPr id="27" name="Shape 25"/>
           <p:cNvSpPr/>
           <p:nvPr/>
         </p:nvSpPr>
@@ -29865,13 +31319,13 @@
       </p:sp>
       <p:sp>
         <p:nvSpPr>
-          <p:cNvPr id="25" name="Shape 23"/>
-          <p:cNvSpPr/>
-          <p:nvPr/>
-        </p:nvSpPr>
-        <p:spPr>
-          <a:xfrm>
-            <a:off x="2999232" y="3364992"/>
+          <p:cNvPr id="28" name="Shape 26"/>
+          <p:cNvSpPr/>
+          <p:nvPr/>
+        </p:nvSpPr>
+        <p:spPr>
+          <a:xfrm>
+            <a:off x="2313432" y="3364992"/>
             <a:ext cx="1645920" cy="475488"/>
           </a:xfrm>
           <a:prstGeom prst="rect">
@@ -29892,13 +31346,13 @@
       </p:sp>
       <p:sp>
         <p:nvSpPr>
-          <p:cNvPr id="26" name="Text 24"/>
-          <p:cNvSpPr/>
-          <p:nvPr/>
-        </p:nvSpPr>
-        <p:spPr>
-          <a:xfrm>
-            <a:off x="2999232" y="3364992"/>
+          <p:cNvPr id="29" name="Text 27"/>
+          <p:cNvSpPr/>
+          <p:nvPr/>
+        </p:nvSpPr>
+        <p:spPr>
+          <a:xfrm>
+            <a:off x="2313432" y="3364992"/>
             <a:ext cx="1645920" cy="475488"/>
           </a:xfrm>
           <a:prstGeom prst="rect">
@@ -29931,14 +31385,14 @@
       </p:sp>
       <p:sp>
         <p:nvSpPr>
-          <p:cNvPr id="27" name="Text 25"/>
-          <p:cNvSpPr/>
-          <p:nvPr/>
-        </p:nvSpPr>
-        <p:spPr>
-          <a:xfrm>
-            <a:off x="4645152" y="3364992"/>
-            <a:ext cx="1097280" cy="475488"/>
+          <p:cNvPr id="30" name="Text 28"/>
+          <p:cNvSpPr/>
+          <p:nvPr/>
+        </p:nvSpPr>
+        <p:spPr>
+          <a:xfrm>
+            <a:off x="3959352" y="3364992"/>
+            <a:ext cx="411480" cy="475488"/>
           </a:xfrm>
           <a:prstGeom prst="rect">
             <a:avLst/>
@@ -29970,13 +31424,13 @@
       </p:sp>
       <p:sp>
         <p:nvSpPr>
-          <p:cNvPr id="28" name="Shape 26"/>
-          <p:cNvSpPr/>
-          <p:nvPr/>
-        </p:nvSpPr>
-        <p:spPr>
-          <a:xfrm>
-            <a:off x="5742432" y="3364992"/>
+          <p:cNvPr id="31" name="Shape 29"/>
+          <p:cNvSpPr/>
+          <p:nvPr/>
+        </p:nvSpPr>
+        <p:spPr>
+          <a:xfrm>
+            <a:off x="4370832" y="3364992"/>
             <a:ext cx="1645920" cy="475488"/>
           </a:xfrm>
           <a:prstGeom prst="rect">
@@ -29997,13 +31451,13 @@
       </p:sp>
       <p:sp>
         <p:nvSpPr>
-          <p:cNvPr id="29" name="Text 27"/>
-          <p:cNvSpPr/>
-          <p:nvPr/>
-        </p:nvSpPr>
-        <p:spPr>
-          <a:xfrm>
-            <a:off x="5742432" y="3364992"/>
+          <p:cNvPr id="32" name="Text 30"/>
+          <p:cNvSpPr/>
+          <p:nvPr/>
+        </p:nvSpPr>
+        <p:spPr>
+          <a:xfrm>
+            <a:off x="4370832" y="3364992"/>
             <a:ext cx="1645920" cy="475488"/>
           </a:xfrm>
           <a:prstGeom prst="rect">
@@ -30028,7 +31482,7 @@
                 <a:ea typeface="Trebuchet MS" pitchFamily="34" charset="-122"/>
                 <a:cs typeface="Trebuchet MS" pitchFamily="34" charset="-120"/>
               </a:rPr>
-              <a:t>clude</a:t>
+              <a:t>trib</a:t>
             </a:r>
             <a:endParaRPr lang="en-US" sz="1400" dirty="0"/>
           </a:p>
@@ -30036,7 +31490,112 @@
       </p:sp>
       <p:sp>
         <p:nvSpPr>
-          <p:cNvPr id="30" name="Shape 28"/>
+          <p:cNvPr id="33" name="Text 31"/>
+          <p:cNvSpPr/>
+          <p:nvPr/>
+        </p:nvSpPr>
+        <p:spPr>
+          <a:xfrm>
+            <a:off x="6016752" y="3364992"/>
+            <a:ext cx="411480" cy="475488"/>
+          </a:xfrm>
+          <a:prstGeom prst="rect">
+            <a:avLst/>
+          </a:prstGeom>
+          <a:noFill/>
+          <a:ln/>
+        </p:spPr>
+        <p:txBody>
+          <a:bodyPr wrap="square" lIns="0" tIns="0" rIns="0" bIns="0" rtlCol="0" anchor="ctr"/>
+          <a:lstStyle/>
+          <a:p>
+            <a:pPr algn="ctr" indent="0" marL="0">
+              <a:buNone/>
+            </a:pPr>
+            <a:r>
+              <a:rPr lang="en-US" sz="1600" b="1" dirty="0">
+                <a:solidFill>
+                  <a:srgbClr val="0D9488"/>
+                </a:solidFill>
+                <a:latin typeface="Trebuchet MS" pitchFamily="34" charset="0"/>
+                <a:ea typeface="Trebuchet MS" pitchFamily="34" charset="-122"/>
+                <a:cs typeface="Trebuchet MS" pitchFamily="34" charset="-120"/>
+              </a:rPr>
+              <a:t>·</a:t>
+            </a:r>
+            <a:endParaRPr lang="en-US" sz="1600" dirty="0"/>
+          </a:p>
+        </p:txBody>
+      </p:sp>
+      <p:sp>
+        <p:nvSpPr>
+          <p:cNvPr id="34" name="Shape 32"/>
+          <p:cNvSpPr/>
+          <p:nvPr/>
+        </p:nvSpPr>
+        <p:spPr>
+          <a:xfrm>
+            <a:off x="6428232" y="3364992"/>
+            <a:ext cx="1645920" cy="475488"/>
+          </a:xfrm>
+          <a:prstGeom prst="rect">
+            <a:avLst>
+              <a:gd name="adj" fmla="val 9615"/>
+            </a:avLst>
+          </a:prstGeom>
+          <a:solidFill>
+            <a:srgbClr val="FFFFFF"/>
+          </a:solidFill>
+          <a:ln w="12700">
+            <a:solidFill>
+              <a:srgbClr val="0D9488"/>
+            </a:solidFill>
+            <a:prstDash val="solid"/>
+          </a:ln>
+        </p:spPr>
+      </p:sp>
+      <p:sp>
+        <p:nvSpPr>
+          <p:cNvPr id="35" name="Text 33"/>
+          <p:cNvSpPr/>
+          <p:nvPr/>
+        </p:nvSpPr>
+        <p:spPr>
+          <a:xfrm>
+            <a:off x="6428232" y="3364992"/>
+            <a:ext cx="1645920" cy="475488"/>
+          </a:xfrm>
+          <a:prstGeom prst="rect">
+            <a:avLst/>
+          </a:prstGeom>
+          <a:noFill/>
+          <a:ln/>
+        </p:spPr>
+        <p:txBody>
+          <a:bodyPr wrap="square" lIns="0" tIns="0" rIns="0" bIns="0" rtlCol="0" anchor="ctr"/>
+          <a:lstStyle/>
+          <a:p>
+            <a:pPr algn="ctr" indent="0" marL="0">
+              <a:buNone/>
+            </a:pPr>
+            <a:r>
+              <a:rPr lang="en-US" sz="1400" b="1" dirty="0">
+                <a:solidFill>
+                  <a:srgbClr val="0D9488"/>
+                </a:solidFill>
+                <a:latin typeface="Trebuchet MS" pitchFamily="34" charset="0"/>
+                <a:ea typeface="Trebuchet MS" pitchFamily="34" charset="-122"/>
+                <a:cs typeface="Trebuchet MS" pitchFamily="34" charset="-120"/>
+              </a:rPr>
+              <a:t>ute</a:t>
+            </a:r>
+            <a:endParaRPr lang="en-US" sz="1400" dirty="0"/>
+          </a:p>
+        </p:txBody>
+      </p:sp>
+      <p:sp>
+        <p:nvSpPr>
+          <p:cNvPr id="36" name="Shape 34"/>
           <p:cNvSpPr/>
           <p:nvPr/>
         </p:nvSpPr>
@@ -30063,7 +31622,7 @@
       </p:sp>
       <p:sp>
         <p:nvSpPr>
-          <p:cNvPr id="31" name="Text 29"/>
+          <p:cNvPr id="37" name="Text 35"/>
           <p:cNvSpPr/>
           <p:nvPr/>
         </p:nvSpPr>
@@ -30102,7 +31661,7 @@
       </p:sp>
       <p:sp>
         <p:nvSpPr>
-          <p:cNvPr id="32" name="Shape 30"/>
+          <p:cNvPr id="38" name="Shape 36"/>
           <p:cNvSpPr/>
           <p:nvPr/>
         </p:nvSpPr>
@@ -30129,7 +31688,7 @@
       </p:sp>
       <p:sp>
         <p:nvSpPr>
-          <p:cNvPr id="33" name="Text 31"/>
+          <p:cNvPr id="39" name="Text 37"/>
           <p:cNvSpPr/>
           <p:nvPr/>
         </p:nvSpPr>
@@ -30591,7 +32150,7 @@
                 <a:ea typeface="Trebuchet MS" pitchFamily="34" charset="-122"/>
                 <a:cs typeface="Trebuchet MS" pitchFamily="34" charset="-120"/>
               </a:rPr>
-              <a:t>conclude</a:t>
+              <a:t>contribute</a:t>
             </a:r>
             <a:endParaRPr lang="en-US" sz="2800" dirty="0"/>
           </a:p>
@@ -30671,7 +32230,7 @@
         </p:nvSpPr>
         <p:spPr>
           <a:xfrm>
-            <a:off x="2938272" y="2258568"/>
+            <a:off x="2221992" y="2258568"/>
             <a:ext cx="1828800" cy="292608"/>
           </a:xfrm>
           <a:prstGeom prst="rect">
@@ -30705,7 +32264,7 @@
         </p:nvSpPr>
         <p:spPr>
           <a:xfrm>
-            <a:off x="2938272" y="2258568"/>
+            <a:off x="2221992" y="2258568"/>
             <a:ext cx="1828800" cy="292608"/>
           </a:xfrm>
           <a:prstGeom prst="rect">
@@ -30744,7 +32303,7 @@
         </p:nvSpPr>
         <p:spPr>
           <a:xfrm>
-            <a:off x="2938272" y="2569464"/>
+            <a:off x="2221992" y="2569464"/>
             <a:ext cx="1828800" cy="201168"/>
           </a:xfrm>
           <a:prstGeom prst="rect">
@@ -30783,7 +32342,7 @@
         </p:nvSpPr>
         <p:spPr>
           <a:xfrm>
-            <a:off x="5803392" y="2258568"/>
+            <a:off x="4370832" y="2258568"/>
             <a:ext cx="1828800" cy="292608"/>
           </a:xfrm>
           <a:prstGeom prst="rect">
@@ -30817,7 +32376,7 @@
         </p:nvSpPr>
         <p:spPr>
           <a:xfrm>
-            <a:off x="5803392" y="2258568"/>
+            <a:off x="4370832" y="2258568"/>
             <a:ext cx="1828800" cy="292608"/>
           </a:xfrm>
           <a:prstGeom prst="rect">
@@ -30842,7 +32401,7 @@
                 <a:ea typeface="Trebuchet MS" pitchFamily="34" charset="-122"/>
                 <a:cs typeface="Trebuchet MS" pitchFamily="34" charset="-120"/>
               </a:rPr>
-              <a:t>clude</a:t>
+              <a:t>tribut</a:t>
             </a:r>
             <a:endParaRPr lang="en-US" sz="1300" dirty="0"/>
           </a:p>
@@ -30856,7 +32415,7 @@
         </p:nvSpPr>
         <p:spPr>
           <a:xfrm>
-            <a:off x="5803392" y="2569464"/>
+            <a:off x="4370832" y="2569464"/>
             <a:ext cx="1828800" cy="201168"/>
           </a:xfrm>
           <a:prstGeom prst="rect">
@@ -30881,7 +32440,7 @@
                 <a:ea typeface="Calibri" pitchFamily="34" charset="-122"/>
                 <a:cs typeface="Calibri" pitchFamily="34" charset="-120"/>
               </a:rPr>
-              <a:t>close, shut</a:t>
+              <a:t>give</a:t>
             </a:r>
             <a:endParaRPr lang="en-US" sz="850" dirty="0"/>
           </a:p>
@@ -30890,6 +32449,118 @@
       <p:sp>
         <p:nvSpPr>
           <p:cNvPr id="22" name="Shape 20"/>
+          <p:cNvSpPr/>
+          <p:nvPr/>
+        </p:nvSpPr>
+        <p:spPr>
+          <a:xfrm>
+            <a:off x="6519672" y="2258568"/>
+            <a:ext cx="1828800" cy="292608"/>
+          </a:xfrm>
+          <a:prstGeom prst="rect">
+            <a:avLst>
+              <a:gd name="adj" fmla="val 25000"/>
+            </a:avLst>
+          </a:prstGeom>
+          <a:solidFill>
+            <a:srgbClr val="FCE7F3"/>
+          </a:solidFill>
+          <a:ln w="19050">
+            <a:solidFill>
+              <a:srgbClr val="DB2777"/>
+            </a:solidFill>
+            <a:prstDash val="solid"/>
+          </a:ln>
+          <a:effectLst>
+            <a:outerShdw sx="100000" sy="100000" kx="0" ky="0" algn="bl" rotWithShape="0" blurRad="101600" dist="38100" dir="8100000">
+              <a:srgbClr val="000000">
+                <a:alpha val="12000"/>
+              </a:srgbClr>
+            </a:outerShdw>
+          </a:effectLst>
+        </p:spPr>
+      </p:sp>
+      <p:sp>
+        <p:nvSpPr>
+          <p:cNvPr id="23" name="Text 21"/>
+          <p:cNvSpPr/>
+          <p:nvPr/>
+        </p:nvSpPr>
+        <p:spPr>
+          <a:xfrm>
+            <a:off x="6519672" y="2258568"/>
+            <a:ext cx="1828800" cy="292608"/>
+          </a:xfrm>
+          <a:prstGeom prst="rect">
+            <a:avLst/>
+          </a:prstGeom>
+          <a:noFill/>
+          <a:ln/>
+        </p:spPr>
+        <p:txBody>
+          <a:bodyPr wrap="square" lIns="0" tIns="0" rIns="0" bIns="0" rtlCol="0" anchor="ctr"/>
+          <a:lstStyle/>
+          <a:p>
+            <a:pPr algn="ctr" indent="0" marL="0">
+              <a:buNone/>
+            </a:pPr>
+            <a:r>
+              <a:rPr lang="en-US" sz="1300" b="1" dirty="0">
+                <a:solidFill>
+                  <a:srgbClr val="9D174D"/>
+                </a:solidFill>
+                <a:latin typeface="Trebuchet MS" pitchFamily="34" charset="0"/>
+                <a:ea typeface="Trebuchet MS" pitchFamily="34" charset="-122"/>
+                <a:cs typeface="Trebuchet MS" pitchFamily="34" charset="-120"/>
+              </a:rPr>
+              <a:t>e</a:t>
+            </a:r>
+            <a:endParaRPr lang="en-US" sz="1300" dirty="0"/>
+          </a:p>
+        </p:txBody>
+      </p:sp>
+      <p:sp>
+        <p:nvSpPr>
+          <p:cNvPr id="24" name="Text 22"/>
+          <p:cNvSpPr/>
+          <p:nvPr/>
+        </p:nvSpPr>
+        <p:spPr>
+          <a:xfrm>
+            <a:off x="6519672" y="2569464"/>
+            <a:ext cx="1828800" cy="201168"/>
+          </a:xfrm>
+          <a:prstGeom prst="rect">
+            <a:avLst/>
+          </a:prstGeom>
+          <a:noFill/>
+          <a:ln/>
+        </p:spPr>
+        <p:txBody>
+          <a:bodyPr wrap="square" lIns="0" tIns="0" rIns="0" bIns="0" rtlCol="0" anchor="t"/>
+          <a:lstStyle/>
+          <a:p>
+            <a:pPr algn="ctr" indent="0" marL="0">
+              <a:buNone/>
+            </a:pPr>
+            <a:r>
+              <a:rPr lang="en-US" sz="850" dirty="0">
+                <a:solidFill>
+                  <a:srgbClr val="475569"/>
+                </a:solidFill>
+                <a:latin typeface="Calibri" pitchFamily="34" charset="0"/>
+                <a:ea typeface="Calibri" pitchFamily="34" charset="-122"/>
+                <a:cs typeface="Calibri" pitchFamily="34" charset="-120"/>
+              </a:rPr>
+              <a:t>silent e</a:t>
+            </a:r>
+            <a:endParaRPr lang="en-US" sz="850" dirty="0"/>
+          </a:p>
+        </p:txBody>
+      </p:sp>
+      <p:sp>
+        <p:nvSpPr>
+          <p:cNvPr id="25" name="Shape 23"/>
           <p:cNvSpPr/>
           <p:nvPr/>
         </p:nvSpPr>
@@ -30916,7 +32587,7 @@
       </p:sp>
       <p:sp>
         <p:nvSpPr>
-          <p:cNvPr id="23" name="Text 21"/>
+          <p:cNvPr id="26" name="Text 24"/>
           <p:cNvSpPr/>
           <p:nvPr/>
         </p:nvSpPr>
@@ -30955,7 +32626,7 @@
       </p:sp>
       <p:sp>
         <p:nvSpPr>
-          <p:cNvPr id="24" name="Shape 22"/>
+          <p:cNvPr id="27" name="Shape 25"/>
           <p:cNvSpPr/>
           <p:nvPr/>
         </p:nvSpPr>
@@ -30982,13 +32653,13 @@
       </p:sp>
       <p:sp>
         <p:nvSpPr>
-          <p:cNvPr id="25" name="Shape 23"/>
-          <p:cNvSpPr/>
-          <p:nvPr/>
-        </p:nvSpPr>
-        <p:spPr>
-          <a:xfrm>
-            <a:off x="2999232" y="3364992"/>
+          <p:cNvPr id="28" name="Shape 26"/>
+          <p:cNvSpPr/>
+          <p:nvPr/>
+        </p:nvSpPr>
+        <p:spPr>
+          <a:xfrm>
+            <a:off x="2313432" y="3364992"/>
             <a:ext cx="1645920" cy="475488"/>
           </a:xfrm>
           <a:prstGeom prst="rect">
@@ -31009,13 +32680,13 @@
       </p:sp>
       <p:sp>
         <p:nvSpPr>
-          <p:cNvPr id="26" name="Text 24"/>
-          <p:cNvSpPr/>
-          <p:nvPr/>
-        </p:nvSpPr>
-        <p:spPr>
-          <a:xfrm>
-            <a:off x="2999232" y="3364992"/>
+          <p:cNvPr id="29" name="Text 27"/>
+          <p:cNvSpPr/>
+          <p:nvPr/>
+        </p:nvSpPr>
+        <p:spPr>
+          <a:xfrm>
+            <a:off x="2313432" y="3364992"/>
             <a:ext cx="1645920" cy="475488"/>
           </a:xfrm>
           <a:prstGeom prst="rect">
@@ -31048,14 +32719,14 @@
       </p:sp>
       <p:sp>
         <p:nvSpPr>
-          <p:cNvPr id="27" name="Text 25"/>
-          <p:cNvSpPr/>
-          <p:nvPr/>
-        </p:nvSpPr>
-        <p:spPr>
-          <a:xfrm>
-            <a:off x="4645152" y="3364992"/>
-            <a:ext cx="1097280" cy="475488"/>
+          <p:cNvPr id="30" name="Text 28"/>
+          <p:cNvSpPr/>
+          <p:nvPr/>
+        </p:nvSpPr>
+        <p:spPr>
+          <a:xfrm>
+            <a:off x="3959352" y="3364992"/>
+            <a:ext cx="411480" cy="475488"/>
           </a:xfrm>
           <a:prstGeom prst="rect">
             <a:avLst/>
@@ -31087,13 +32758,13 @@
       </p:sp>
       <p:sp>
         <p:nvSpPr>
-          <p:cNvPr id="28" name="Shape 26"/>
-          <p:cNvSpPr/>
-          <p:nvPr/>
-        </p:nvSpPr>
-        <p:spPr>
-          <a:xfrm>
-            <a:off x="5742432" y="3364992"/>
+          <p:cNvPr id="31" name="Shape 29"/>
+          <p:cNvSpPr/>
+          <p:nvPr/>
+        </p:nvSpPr>
+        <p:spPr>
+          <a:xfrm>
+            <a:off x="4370832" y="3364992"/>
             <a:ext cx="1645920" cy="475488"/>
           </a:xfrm>
           <a:prstGeom prst="rect">
@@ -31114,13 +32785,13 @@
       </p:sp>
       <p:sp>
         <p:nvSpPr>
-          <p:cNvPr id="29" name="Text 27"/>
-          <p:cNvSpPr/>
-          <p:nvPr/>
-        </p:nvSpPr>
-        <p:spPr>
-          <a:xfrm>
-            <a:off x="5742432" y="3364992"/>
+          <p:cNvPr id="32" name="Text 30"/>
+          <p:cNvSpPr/>
+          <p:nvPr/>
+        </p:nvSpPr>
+        <p:spPr>
+          <a:xfrm>
+            <a:off x="4370832" y="3364992"/>
             <a:ext cx="1645920" cy="475488"/>
           </a:xfrm>
           <a:prstGeom prst="rect">
@@ -31145,7 +32816,7 @@
                 <a:ea typeface="Trebuchet MS" pitchFamily="34" charset="-122"/>
                 <a:cs typeface="Trebuchet MS" pitchFamily="34" charset="-120"/>
               </a:rPr>
-              <a:t>clude</a:t>
+              <a:t>trib</a:t>
             </a:r>
             <a:endParaRPr lang="en-US" sz="1400" dirty="0"/>
           </a:p>
@@ -31153,7 +32824,112 @@
       </p:sp>
       <p:sp>
         <p:nvSpPr>
-          <p:cNvPr id="30" name="Shape 28"/>
+          <p:cNvPr id="33" name="Text 31"/>
+          <p:cNvSpPr/>
+          <p:nvPr/>
+        </p:nvSpPr>
+        <p:spPr>
+          <a:xfrm>
+            <a:off x="6016752" y="3364992"/>
+            <a:ext cx="411480" cy="475488"/>
+          </a:xfrm>
+          <a:prstGeom prst="rect">
+            <a:avLst/>
+          </a:prstGeom>
+          <a:noFill/>
+          <a:ln/>
+        </p:spPr>
+        <p:txBody>
+          <a:bodyPr wrap="square" lIns="0" tIns="0" rIns="0" bIns="0" rtlCol="0" anchor="ctr"/>
+          <a:lstStyle/>
+          <a:p>
+            <a:pPr algn="ctr" indent="0" marL="0">
+              <a:buNone/>
+            </a:pPr>
+            <a:r>
+              <a:rPr lang="en-US" sz="1600" b="1" dirty="0">
+                <a:solidFill>
+                  <a:srgbClr val="0D9488"/>
+                </a:solidFill>
+                <a:latin typeface="Trebuchet MS" pitchFamily="34" charset="0"/>
+                <a:ea typeface="Trebuchet MS" pitchFamily="34" charset="-122"/>
+                <a:cs typeface="Trebuchet MS" pitchFamily="34" charset="-120"/>
+              </a:rPr>
+              <a:t>·</a:t>
+            </a:r>
+            <a:endParaRPr lang="en-US" sz="1600" dirty="0"/>
+          </a:p>
+        </p:txBody>
+      </p:sp>
+      <p:sp>
+        <p:nvSpPr>
+          <p:cNvPr id="34" name="Shape 32"/>
+          <p:cNvSpPr/>
+          <p:nvPr/>
+        </p:nvSpPr>
+        <p:spPr>
+          <a:xfrm>
+            <a:off x="6428232" y="3364992"/>
+            <a:ext cx="1645920" cy="475488"/>
+          </a:xfrm>
+          <a:prstGeom prst="rect">
+            <a:avLst>
+              <a:gd name="adj" fmla="val 9615"/>
+            </a:avLst>
+          </a:prstGeom>
+          <a:solidFill>
+            <a:srgbClr val="FFFFFF"/>
+          </a:solidFill>
+          <a:ln w="12700">
+            <a:solidFill>
+              <a:srgbClr val="0D9488"/>
+            </a:solidFill>
+            <a:prstDash val="solid"/>
+          </a:ln>
+        </p:spPr>
+      </p:sp>
+      <p:sp>
+        <p:nvSpPr>
+          <p:cNvPr id="35" name="Text 33"/>
+          <p:cNvSpPr/>
+          <p:nvPr/>
+        </p:nvSpPr>
+        <p:spPr>
+          <a:xfrm>
+            <a:off x="6428232" y="3364992"/>
+            <a:ext cx="1645920" cy="475488"/>
+          </a:xfrm>
+          <a:prstGeom prst="rect">
+            <a:avLst/>
+          </a:prstGeom>
+          <a:noFill/>
+          <a:ln/>
+        </p:spPr>
+        <p:txBody>
+          <a:bodyPr wrap="square" lIns="0" tIns="0" rIns="0" bIns="0" rtlCol="0" anchor="ctr"/>
+          <a:lstStyle/>
+          <a:p>
+            <a:pPr algn="ctr" indent="0" marL="0">
+              <a:buNone/>
+            </a:pPr>
+            <a:r>
+              <a:rPr lang="en-US" sz="1400" b="1" dirty="0">
+                <a:solidFill>
+                  <a:srgbClr val="0D9488"/>
+                </a:solidFill>
+                <a:latin typeface="Trebuchet MS" pitchFamily="34" charset="0"/>
+                <a:ea typeface="Trebuchet MS" pitchFamily="34" charset="-122"/>
+                <a:cs typeface="Trebuchet MS" pitchFamily="34" charset="-120"/>
+              </a:rPr>
+              <a:t>ute</a:t>
+            </a:r>
+            <a:endParaRPr lang="en-US" sz="1400" dirty="0"/>
+          </a:p>
+        </p:txBody>
+      </p:sp>
+      <p:sp>
+        <p:nvSpPr>
+          <p:cNvPr id="36" name="Shape 34"/>
           <p:cNvSpPr/>
           <p:nvPr/>
         </p:nvSpPr>
@@ -31180,7 +32956,7 @@
       </p:sp>
       <p:sp>
         <p:nvSpPr>
-          <p:cNvPr id="31" name="Text 29"/>
+          <p:cNvPr id="37" name="Text 35"/>
           <p:cNvSpPr/>
           <p:nvPr/>
         </p:nvSpPr>
@@ -31219,7 +32995,7 @@
       </p:sp>
       <p:sp>
         <p:nvSpPr>
-          <p:cNvPr id="32" name="Shape 30"/>
+          <p:cNvPr id="38" name="Shape 36"/>
           <p:cNvSpPr/>
           <p:nvPr/>
         </p:nvSpPr>
@@ -31246,14 +33022,14 @@
       </p:sp>
       <p:sp>
         <p:nvSpPr>
-          <p:cNvPr id="33" name="Shape 31"/>
-          <p:cNvSpPr/>
-          <p:nvPr/>
-        </p:nvSpPr>
-        <p:spPr>
-          <a:xfrm>
-            <a:off x="2254649" y="4169664"/>
-            <a:ext cx="685800" cy="475488"/>
+          <p:cNvPr id="39" name="Shape 37"/>
+          <p:cNvSpPr/>
+          <p:nvPr/>
+        </p:nvSpPr>
+        <p:spPr>
+          <a:xfrm>
+            <a:off x="1951330" y="4169664"/>
+            <a:ext cx="676656" cy="475488"/>
           </a:xfrm>
           <a:prstGeom prst="rect">
             <a:avLst>
@@ -31273,14 +33049,14 @@
       </p:sp>
       <p:sp>
         <p:nvSpPr>
-          <p:cNvPr id="34" name="Text 32"/>
-          <p:cNvSpPr/>
-          <p:nvPr/>
-        </p:nvSpPr>
-        <p:spPr>
-          <a:xfrm>
-            <a:off x="2254649" y="4169664"/>
-            <a:ext cx="685800" cy="475488"/>
+          <p:cNvPr id="40" name="Text 38"/>
+          <p:cNvSpPr/>
+          <p:nvPr/>
+        </p:nvSpPr>
+        <p:spPr>
+          <a:xfrm>
+            <a:off x="1951330" y="4169664"/>
+            <a:ext cx="676656" cy="475488"/>
           </a:xfrm>
           <a:prstGeom prst="rect">
             <a:avLst/>
@@ -31312,14 +33088,14 @@
       </p:sp>
       <p:sp>
         <p:nvSpPr>
-          <p:cNvPr id="35" name="Shape 33"/>
-          <p:cNvSpPr/>
-          <p:nvPr/>
-        </p:nvSpPr>
-        <p:spPr>
-          <a:xfrm>
-            <a:off x="3293146" y="4169664"/>
-            <a:ext cx="685800" cy="475488"/>
+          <p:cNvPr id="41" name="Shape 39"/>
+          <p:cNvSpPr/>
+          <p:nvPr/>
+        </p:nvSpPr>
+        <p:spPr>
+          <a:xfrm>
+            <a:off x="2677363" y="4169664"/>
+            <a:ext cx="676656" cy="475488"/>
           </a:xfrm>
           <a:prstGeom prst="rect">
             <a:avLst>
@@ -31339,14 +33115,14 @@
       </p:sp>
       <p:sp>
         <p:nvSpPr>
-          <p:cNvPr id="36" name="Text 34"/>
-          <p:cNvSpPr/>
-          <p:nvPr/>
-        </p:nvSpPr>
-        <p:spPr>
-          <a:xfrm>
-            <a:off x="3293146" y="4169664"/>
-            <a:ext cx="685800" cy="475488"/>
+          <p:cNvPr id="42" name="Text 40"/>
+          <p:cNvSpPr/>
+          <p:nvPr/>
+        </p:nvSpPr>
+        <p:spPr>
+          <a:xfrm>
+            <a:off x="2677363" y="4169664"/>
+            <a:ext cx="676656" cy="475488"/>
           </a:xfrm>
           <a:prstGeom prst="rect">
             <a:avLst/>
@@ -31378,14 +33154,14 @@
       </p:sp>
       <p:sp>
         <p:nvSpPr>
-          <p:cNvPr id="37" name="Shape 35"/>
-          <p:cNvSpPr/>
-          <p:nvPr/>
-        </p:nvSpPr>
-        <p:spPr>
-          <a:xfrm>
-            <a:off x="4331643" y="4169664"/>
-            <a:ext cx="685800" cy="475488"/>
+          <p:cNvPr id="43" name="Shape 41"/>
+          <p:cNvSpPr/>
+          <p:nvPr/>
+        </p:nvSpPr>
+        <p:spPr>
+          <a:xfrm>
+            <a:off x="3403397" y="4169664"/>
+            <a:ext cx="676656" cy="475488"/>
           </a:xfrm>
           <a:prstGeom prst="rect">
             <a:avLst>
@@ -31405,14 +33181,14 @@
       </p:sp>
       <p:sp>
         <p:nvSpPr>
-          <p:cNvPr id="38" name="Text 36"/>
-          <p:cNvSpPr/>
-          <p:nvPr/>
-        </p:nvSpPr>
-        <p:spPr>
-          <a:xfrm>
-            <a:off x="4331643" y="4169664"/>
-            <a:ext cx="685800" cy="475488"/>
+          <p:cNvPr id="44" name="Text 42"/>
+          <p:cNvSpPr/>
+          <p:nvPr/>
+        </p:nvSpPr>
+        <p:spPr>
+          <a:xfrm>
+            <a:off x="3403397" y="4169664"/>
+            <a:ext cx="676656" cy="475488"/>
           </a:xfrm>
           <a:prstGeom prst="rect">
             <a:avLst/>
@@ -31444,14 +33220,14 @@
       </p:sp>
       <p:sp>
         <p:nvSpPr>
-          <p:cNvPr id="39" name="Shape 37"/>
-          <p:cNvSpPr/>
-          <p:nvPr/>
-        </p:nvSpPr>
-        <p:spPr>
-          <a:xfrm>
-            <a:off x="5370141" y="4169664"/>
-            <a:ext cx="685800" cy="475488"/>
+          <p:cNvPr id="45" name="Shape 43"/>
+          <p:cNvSpPr/>
+          <p:nvPr/>
+        </p:nvSpPr>
+        <p:spPr>
+          <a:xfrm>
+            <a:off x="4129430" y="4169664"/>
+            <a:ext cx="676656" cy="475488"/>
           </a:xfrm>
           <a:prstGeom prst="rect">
             <a:avLst>
@@ -31471,14 +33247,14 @@
       </p:sp>
       <p:sp>
         <p:nvSpPr>
-          <p:cNvPr id="40" name="Text 38"/>
-          <p:cNvSpPr/>
-          <p:nvPr/>
-        </p:nvSpPr>
-        <p:spPr>
-          <a:xfrm>
-            <a:off x="5370141" y="4169664"/>
-            <a:ext cx="685800" cy="475488"/>
+          <p:cNvPr id="46" name="Text 44"/>
+          <p:cNvSpPr/>
+          <p:nvPr/>
+        </p:nvSpPr>
+        <p:spPr>
+          <a:xfrm>
+            <a:off x="4129430" y="4169664"/>
+            <a:ext cx="676656" cy="475488"/>
           </a:xfrm>
           <a:prstGeom prst="rect">
             <a:avLst/>
@@ -31502,7 +33278,7 @@
                 <a:ea typeface="Trebuchet MS" pitchFamily="34" charset="-122"/>
                 <a:cs typeface="Trebuchet MS" pitchFamily="34" charset="-120"/>
               </a:rPr>
-              <a:t>cl</a:t>
+              <a:t>t</a:t>
             </a:r>
             <a:endParaRPr lang="en-US" sz="900" dirty="0"/>
           </a:p>
@@ -31510,14 +33286,14 @@
       </p:sp>
       <p:sp>
         <p:nvSpPr>
-          <p:cNvPr id="41" name="Shape 39"/>
-          <p:cNvSpPr/>
-          <p:nvPr/>
-        </p:nvSpPr>
-        <p:spPr>
-          <a:xfrm>
-            <a:off x="6408638" y="4169664"/>
-            <a:ext cx="685800" cy="475488"/>
+          <p:cNvPr id="47" name="Shape 45"/>
+          <p:cNvSpPr/>
+          <p:nvPr/>
+        </p:nvSpPr>
+        <p:spPr>
+          <a:xfrm>
+            <a:off x="4855464" y="4169664"/>
+            <a:ext cx="676656" cy="475488"/>
           </a:xfrm>
           <a:prstGeom prst="rect">
             <a:avLst>
@@ -31537,14 +33313,14 @@
       </p:sp>
       <p:sp>
         <p:nvSpPr>
-          <p:cNvPr id="42" name="Text 40"/>
-          <p:cNvSpPr/>
-          <p:nvPr/>
-        </p:nvSpPr>
-        <p:spPr>
-          <a:xfrm>
-            <a:off x="6408638" y="4169664"/>
-            <a:ext cx="685800" cy="475488"/>
+          <p:cNvPr id="48" name="Text 46"/>
+          <p:cNvSpPr/>
+          <p:nvPr/>
+        </p:nvSpPr>
+        <p:spPr>
+          <a:xfrm>
+            <a:off x="4855464" y="4169664"/>
+            <a:ext cx="676656" cy="475488"/>
           </a:xfrm>
           <a:prstGeom prst="rect">
             <a:avLst/>
@@ -31568,7 +33344,7 @@
                 <a:ea typeface="Trebuchet MS" pitchFamily="34" charset="-122"/>
                 <a:cs typeface="Trebuchet MS" pitchFamily="34" charset="-120"/>
               </a:rPr>
-              <a:t>u</a:t>
+              <a:t>r</a:t>
             </a:r>
             <a:endParaRPr lang="en-US" sz="900" dirty="0"/>
           </a:p>
@@ -31576,14 +33352,14 @@
       </p:sp>
       <p:sp>
         <p:nvSpPr>
-          <p:cNvPr id="43" name="Shape 41"/>
-          <p:cNvSpPr/>
-          <p:nvPr/>
-        </p:nvSpPr>
-        <p:spPr>
-          <a:xfrm>
-            <a:off x="7447135" y="4169664"/>
-            <a:ext cx="685800" cy="475488"/>
+          <p:cNvPr id="49" name="Shape 47"/>
+          <p:cNvSpPr/>
+          <p:nvPr/>
+        </p:nvSpPr>
+        <p:spPr>
+          <a:xfrm>
+            <a:off x="5581498" y="4169664"/>
+            <a:ext cx="676656" cy="475488"/>
           </a:xfrm>
           <a:prstGeom prst="rect">
             <a:avLst>
@@ -31603,14 +33379,14 @@
       </p:sp>
       <p:sp>
         <p:nvSpPr>
-          <p:cNvPr id="44" name="Text 42"/>
-          <p:cNvSpPr/>
-          <p:nvPr/>
-        </p:nvSpPr>
-        <p:spPr>
-          <a:xfrm>
-            <a:off x="7447135" y="4169664"/>
-            <a:ext cx="685800" cy="475488"/>
+          <p:cNvPr id="50" name="Text 48"/>
+          <p:cNvSpPr/>
+          <p:nvPr/>
+        </p:nvSpPr>
+        <p:spPr>
+          <a:xfrm>
+            <a:off x="5581498" y="4169664"/>
+            <a:ext cx="676656" cy="475488"/>
           </a:xfrm>
           <a:prstGeom prst="rect">
             <a:avLst/>
@@ -31634,7 +33410,205 @@
                 <a:ea typeface="Trebuchet MS" pitchFamily="34" charset="-122"/>
                 <a:cs typeface="Trebuchet MS" pitchFamily="34" charset="-120"/>
               </a:rPr>
-              <a:t>de</a:t>
+              <a:t>i</a:t>
+            </a:r>
+            <a:endParaRPr lang="en-US" sz="900" dirty="0"/>
+          </a:p>
+        </p:txBody>
+      </p:sp>
+      <p:sp>
+        <p:nvSpPr>
+          <p:cNvPr id="51" name="Shape 49"/>
+          <p:cNvSpPr/>
+          <p:nvPr/>
+        </p:nvSpPr>
+        <p:spPr>
+          <a:xfrm>
+            <a:off x="6307531" y="4169664"/>
+            <a:ext cx="676656" cy="475488"/>
+          </a:xfrm>
+          <a:prstGeom prst="rect">
+            <a:avLst>
+              <a:gd name="adj" fmla="val 7692"/>
+            </a:avLst>
+          </a:prstGeom>
+          <a:solidFill>
+            <a:srgbClr val="FFFFFF"/>
+          </a:solidFill>
+          <a:ln w="12700">
+            <a:solidFill>
+              <a:srgbClr val="DB2777"/>
+            </a:solidFill>
+            <a:prstDash val="solid"/>
+          </a:ln>
+        </p:spPr>
+      </p:sp>
+      <p:sp>
+        <p:nvSpPr>
+          <p:cNvPr id="52" name="Text 50"/>
+          <p:cNvSpPr/>
+          <p:nvPr/>
+        </p:nvSpPr>
+        <p:spPr>
+          <a:xfrm>
+            <a:off x="6307531" y="4169664"/>
+            <a:ext cx="676656" cy="475488"/>
+          </a:xfrm>
+          <a:prstGeom prst="rect">
+            <a:avLst/>
+          </a:prstGeom>
+          <a:noFill/>
+          <a:ln/>
+        </p:spPr>
+        <p:txBody>
+          <a:bodyPr wrap="square" lIns="0" tIns="0" rIns="0" bIns="0" rtlCol="0" anchor="ctr"/>
+          <a:lstStyle/>
+          <a:p>
+            <a:pPr algn="ctr" indent="0" marL="0">
+              <a:buNone/>
+            </a:pPr>
+            <a:r>
+              <a:rPr lang="en-US" sz="900" b="1" dirty="0">
+                <a:solidFill>
+                  <a:srgbClr val="9D174D"/>
+                </a:solidFill>
+                <a:latin typeface="Trebuchet MS" pitchFamily="34" charset="0"/>
+                <a:ea typeface="Trebuchet MS" pitchFamily="34" charset="-122"/>
+                <a:cs typeface="Trebuchet MS" pitchFamily="34" charset="-120"/>
+              </a:rPr>
+              <a:t>b</a:t>
+            </a:r>
+            <a:endParaRPr lang="en-US" sz="900" dirty="0"/>
+          </a:p>
+        </p:txBody>
+      </p:sp>
+      <p:sp>
+        <p:nvSpPr>
+          <p:cNvPr id="53" name="Shape 51"/>
+          <p:cNvSpPr/>
+          <p:nvPr/>
+        </p:nvSpPr>
+        <p:spPr>
+          <a:xfrm>
+            <a:off x="7033565" y="4169664"/>
+            <a:ext cx="676656" cy="475488"/>
+          </a:xfrm>
+          <a:prstGeom prst="rect">
+            <a:avLst>
+              <a:gd name="adj" fmla="val 7692"/>
+            </a:avLst>
+          </a:prstGeom>
+          <a:solidFill>
+            <a:srgbClr val="FFFFFF"/>
+          </a:solidFill>
+          <a:ln w="12700">
+            <a:solidFill>
+              <a:srgbClr val="DB2777"/>
+            </a:solidFill>
+            <a:prstDash val="solid"/>
+          </a:ln>
+        </p:spPr>
+      </p:sp>
+      <p:sp>
+        <p:nvSpPr>
+          <p:cNvPr id="54" name="Text 52"/>
+          <p:cNvSpPr/>
+          <p:nvPr/>
+        </p:nvSpPr>
+        <p:spPr>
+          <a:xfrm>
+            <a:off x="7033565" y="4169664"/>
+            <a:ext cx="676656" cy="475488"/>
+          </a:xfrm>
+          <a:prstGeom prst="rect">
+            <a:avLst/>
+          </a:prstGeom>
+          <a:noFill/>
+          <a:ln/>
+        </p:spPr>
+        <p:txBody>
+          <a:bodyPr wrap="square" lIns="0" tIns="0" rIns="0" bIns="0" rtlCol="0" anchor="ctr"/>
+          <a:lstStyle/>
+          <a:p>
+            <a:pPr algn="ctr" indent="0" marL="0">
+              <a:buNone/>
+            </a:pPr>
+            <a:r>
+              <a:rPr lang="en-US" sz="900" b="1" dirty="0">
+                <a:solidFill>
+                  <a:srgbClr val="9D174D"/>
+                </a:solidFill>
+                <a:latin typeface="Trebuchet MS" pitchFamily="34" charset="0"/>
+                <a:ea typeface="Trebuchet MS" pitchFamily="34" charset="-122"/>
+                <a:cs typeface="Trebuchet MS" pitchFamily="34" charset="-120"/>
+              </a:rPr>
+              <a:t>u</a:t>
+            </a:r>
+            <a:endParaRPr lang="en-US" sz="900" dirty="0"/>
+          </a:p>
+        </p:txBody>
+      </p:sp>
+      <p:sp>
+        <p:nvSpPr>
+          <p:cNvPr id="55" name="Shape 53"/>
+          <p:cNvSpPr/>
+          <p:nvPr/>
+        </p:nvSpPr>
+        <p:spPr>
+          <a:xfrm>
+            <a:off x="7759598" y="4169664"/>
+            <a:ext cx="676656" cy="475488"/>
+          </a:xfrm>
+          <a:prstGeom prst="rect">
+            <a:avLst>
+              <a:gd name="adj" fmla="val 7692"/>
+            </a:avLst>
+          </a:prstGeom>
+          <a:solidFill>
+            <a:srgbClr val="FFFFFF"/>
+          </a:solidFill>
+          <a:ln w="12700">
+            <a:solidFill>
+              <a:srgbClr val="DB2777"/>
+            </a:solidFill>
+            <a:prstDash val="solid"/>
+          </a:ln>
+        </p:spPr>
+      </p:sp>
+      <p:sp>
+        <p:nvSpPr>
+          <p:cNvPr id="56" name="Text 54"/>
+          <p:cNvSpPr/>
+          <p:nvPr/>
+        </p:nvSpPr>
+        <p:spPr>
+          <a:xfrm>
+            <a:off x="7759598" y="4169664"/>
+            <a:ext cx="676656" cy="475488"/>
+          </a:xfrm>
+          <a:prstGeom prst="rect">
+            <a:avLst/>
+          </a:prstGeom>
+          <a:noFill/>
+          <a:ln/>
+        </p:spPr>
+        <p:txBody>
+          <a:bodyPr wrap="square" lIns="0" tIns="0" rIns="0" bIns="0" rtlCol="0" anchor="ctr"/>
+          <a:lstStyle/>
+          <a:p>
+            <a:pPr algn="ctr" indent="0" marL="0">
+              <a:buNone/>
+            </a:pPr>
+            <a:r>
+              <a:rPr lang="en-US" sz="900" b="1" dirty="0">
+                <a:solidFill>
+                  <a:srgbClr val="9D174D"/>
+                </a:solidFill>
+                <a:latin typeface="Trebuchet MS" pitchFamily="34" charset="0"/>
+                <a:ea typeface="Trebuchet MS" pitchFamily="34" charset="-122"/>
+                <a:cs typeface="Trebuchet MS" pitchFamily="34" charset="-120"/>
+              </a:rPr>
+              <a:t>te</a:t>
             </a:r>
             <a:endParaRPr lang="en-US" sz="900" dirty="0"/>
           </a:p>
@@ -33677,7 +35651,7 @@
                 <a:ea typeface="Trebuchet MS" pitchFamily="34" charset="-122"/>
                 <a:cs typeface="Trebuchet MS" pitchFamily="34" charset="-120"/>
               </a:rPr>
-              <a:t>-ing</a:t>
+              <a:t>-ed</a:t>
             </a:r>
             <a:endParaRPr lang="en-US" sz="1300" dirty="0"/>
           </a:p>
@@ -33830,7 +35804,7 @@
                 <a:ea typeface="Trebuchet MS" pitchFamily="34" charset="-122"/>
                 <a:cs typeface="Trebuchet MS" pitchFamily="34" charset="-120"/>
               </a:rPr>
-              <a:t>-ed</a:t>
+              <a:t>-ing</a:t>
             </a:r>
             <a:endParaRPr lang="en-US" sz="1300" dirty="0"/>
           </a:p>
@@ -33919,7 +35893,7 @@
                 <a:ea typeface="Trebuchet MS" pitchFamily="34" charset="-122"/>
                 <a:cs typeface="Trebuchet MS" pitchFamily="34" charset="-120"/>
               </a:rPr>
-              <a:t>firm</a:t>
+              <a:t>vert</a:t>
             </a:r>
             <a:endParaRPr lang="en-US" sz="1300" dirty="0"/>
           </a:p>
@@ -34072,7 +36046,7 @@
                 <a:ea typeface="Trebuchet MS" pitchFamily="34" charset="-122"/>
                 <a:cs typeface="Trebuchet MS" pitchFamily="34" charset="-120"/>
               </a:rPr>
-              <a:t>vert</a:t>
+              <a:t>firm</a:t>
             </a:r>
             <a:endParaRPr lang="en-US" sz="1300" dirty="0"/>
           </a:p>
@@ -34136,7 +36110,7 @@
                 <a:ea typeface="Trebuchet MS" pitchFamily="34" charset="-122"/>
                 <a:cs typeface="Trebuchet MS" pitchFamily="34" charset="-120"/>
               </a:rPr>
-              <a:t>-ly</a:t>
+              <a:t>-ment</a:t>
             </a:r>
             <a:endParaRPr lang="en-US" sz="1300" dirty="0"/>
           </a:p>
@@ -34571,7 +36545,7 @@
                 <a:ea typeface="Trebuchet MS" pitchFamily="34" charset="-122"/>
                 <a:cs typeface="Trebuchet MS" pitchFamily="34" charset="-120"/>
               </a:rPr>
-              <a:t>conclude</a:t>
+              <a:t>consider</a:t>
             </a:r>
             <a:endParaRPr lang="en-US" sz="1200" dirty="0"/>
           </a:p>
@@ -34637,7 +36611,7 @@
                 <a:ea typeface="Trebuchet MS" pitchFamily="34" charset="-122"/>
                 <a:cs typeface="Trebuchet MS" pitchFamily="34" charset="-120"/>
               </a:rPr>
-              <a:t>consider</a:t>
+              <a:t>concentrate</a:t>
             </a:r>
             <a:endParaRPr lang="en-US" sz="1200" dirty="0"/>
           </a:p>
@@ -35891,7 +37865,7 @@
                 <a:ea typeface="Calibri" pitchFamily="34" charset="-122"/>
                 <a:cs typeface="Calibri" pitchFamily="34" charset="-120"/>
               </a:rPr>
-              <a:t>1.  The prefix 'con-' comes from Latin and means 'together' or 'with'.</a:t>
+              <a:t>1.  The prefix 'con-' always stays spelled exactly the same in every word.</a:t>
             </a:r>
             <a:endParaRPr lang="en-US" sz="1300" dirty="0"/>
           </a:p>
@@ -35914,11 +37888,11 @@
             </a:avLst>
           </a:prstGeom>
           <a:solidFill>
-            <a:srgbClr val="DCFCE7"/>
-          </a:solidFill>
-          <a:ln w="12700">
-            <a:solidFill>
-              <a:srgbClr val="16A34A"/>
+            <a:srgbClr val="FEE2E2"/>
+          </a:solidFill>
+          <a:ln w="12700">
+            <a:solidFill>
+              <a:srgbClr val="DC2626"/>
             </a:solidFill>
             <a:prstDash val="solid"/>
           </a:ln>
@@ -35951,13 +37925,13 @@
             <a:r>
               <a:rPr lang="en-US" sz="1100" b="1" dirty="0">
                 <a:solidFill>
-                  <a:srgbClr val="16A34A"/>
+                  <a:srgbClr val="DC2626"/>
                 </a:solidFill>
                 <a:latin typeface="Trebuchet MS" pitchFamily="34" charset="0"/>
                 <a:ea typeface="Trebuchet MS" pitchFamily="34" charset="-122"/>
                 <a:cs typeface="Trebuchet MS" pitchFamily="34" charset="-120"/>
               </a:rPr>
-              <a:t>TRUE</a:t>
+              <a:t>FALSE</a:t>
             </a:r>
             <a:endParaRPr lang="en-US" sz="1100" dirty="0"/>
           </a:p>
@@ -36030,7 +38004,7 @@
                 <a:ea typeface="Calibri" pitchFamily="34" charset="-122"/>
                 <a:cs typeface="Calibri" pitchFamily="34" charset="-120"/>
               </a:rPr>
-              <a:t>2.  The prefix 'con-' always stays spelled exactly as 'con-' no matter what letter follows it.</a:t>
+              <a:t>2.  The prefix 'con-' comes from the Latin word 'cum'.</a:t>
             </a:r>
             <a:endParaRPr lang="en-US" sz="1300" dirty="0"/>
           </a:p>
@@ -36053,11 +38027,11 @@
             </a:avLst>
           </a:prstGeom>
           <a:solidFill>
-            <a:srgbClr val="FEE2E2"/>
-          </a:solidFill>
-          <a:ln w="12700">
-            <a:solidFill>
-              <a:srgbClr val="DC2626"/>
+            <a:srgbClr val="DCFCE7"/>
+          </a:solidFill>
+          <a:ln w="12700">
+            <a:solidFill>
+              <a:srgbClr val="16A34A"/>
             </a:solidFill>
             <a:prstDash val="solid"/>
           </a:ln>
@@ -36090,13 +38064,13 @@
             <a:r>
               <a:rPr lang="en-US" sz="1100" b="1" dirty="0">
                 <a:solidFill>
-                  <a:srgbClr val="DC2626"/>
+                  <a:srgbClr val="16A34A"/>
                 </a:solidFill>
                 <a:latin typeface="Trebuchet MS" pitchFamily="34" charset="0"/>
                 <a:ea typeface="Trebuchet MS" pitchFamily="34" charset="-122"/>
                 <a:cs typeface="Trebuchet MS" pitchFamily="34" charset="-120"/>
               </a:rPr>
-              <a:t>FALSE</a:t>
+              <a:t>TRUE</a:t>
             </a:r>
             <a:endParaRPr lang="en-US" sz="1100" dirty="0"/>
           </a:p>
@@ -36169,7 +38143,7 @@
                 <a:ea typeface="Calibri" pitchFamily="34" charset="-122"/>
                 <a:cs typeface="Calibri" pitchFamily="34" charset="-120"/>
               </a:rPr>
-              <a:t>3.  The word 'connect' uses the prefix 'con-' meaning together.</a:t>
+              <a:t>3.  The word 'connect' uses the prefix 'con-' to mean things are joined together.</a:t>
             </a:r>
             <a:endParaRPr lang="en-US" sz="1300" dirty="0"/>
           </a:p>
@@ -36308,7 +38282,7 @@
                 <a:ea typeface="Calibri" pitchFamily="34" charset="-122"/>
                 <a:cs typeface="Calibri" pitchFamily="34" charset="-120"/>
               </a:rPr>
-              <a:t>4.  Adding 'con-' to a base word always makes the word mean the opposite.</a:t>
+              <a:t>4.  The prefix 'con-' means 'against' or 'opposite'.</a:t>
             </a:r>
             <a:endParaRPr lang="en-US" sz="1300" dirty="0"/>
           </a:p>
@@ -36447,7 +38421,7 @@
                 <a:ea typeface="Calibri" pitchFamily="34" charset="-122"/>
                 <a:cs typeface="Calibri" pitchFamily="34" charset="-120"/>
               </a:rPr>
-              <a:t>5.  The prefix 'con-' can help us understand the meaning of words like 'construct' and 'confirm'.</a:t>
+              <a:t>5.  The prefix 'con-' can mean 'together' or 'with'.</a:t>
             </a:r>
             <a:endParaRPr lang="en-US" sz="1300" dirty="0"/>
           </a:p>
@@ -36981,7 +38955,7 @@
                 <a:ea typeface="Calibri" pitchFamily="34" charset="-122"/>
                 <a:cs typeface="Calibri" pitchFamily="34" charset="-120"/>
               </a:rPr>
-              <a:t>Origin: Latin: com</a:t>
+              <a:t>Origin: Latin: cum</a:t>
             </a:r>
             <a:endParaRPr lang="en-US" sz="1100" dirty="0"/>
           </a:p>
@@ -37416,7 +39390,7 @@
                 <a:ea typeface="Trebuchet MS" pitchFamily="34" charset="-122"/>
                 <a:cs typeface="Trebuchet MS" pitchFamily="34" charset="-120"/>
               </a:rPr>
-              <a:t>conclude</a:t>
+              <a:t>consider</a:t>
             </a:r>
             <a:endParaRPr lang="en-US" sz="1300" dirty="0"/>
           </a:p>
@@ -37482,7 +39456,7 @@
                 <a:ea typeface="Trebuchet MS" pitchFamily="34" charset="-122"/>
                 <a:cs typeface="Trebuchet MS" pitchFamily="34" charset="-120"/>
               </a:rPr>
-              <a:t>consider</a:t>
+              <a:t>concentrate</a:t>
             </a:r>
             <a:endParaRPr lang="en-US" sz="1300" dirty="0"/>
           </a:p>
@@ -38356,7 +40330,7 @@
                 <a:ea typeface="Trebuchet MS" pitchFamily="34" charset="-122"/>
                 <a:cs typeface="Trebuchet MS" pitchFamily="34" charset="-120"/>
               </a:rPr>
-              <a:t>-ing</a:t>
+              <a:t>-ed</a:t>
             </a:r>
             <a:endParaRPr lang="en-US" sz="1300" dirty="0"/>
           </a:p>
@@ -38509,7 +40483,7 @@
                 <a:ea typeface="Trebuchet MS" pitchFamily="34" charset="-122"/>
                 <a:cs typeface="Trebuchet MS" pitchFamily="34" charset="-120"/>
               </a:rPr>
-              <a:t>-ed</a:t>
+              <a:t>-ing</a:t>
             </a:r>
             <a:endParaRPr lang="en-US" sz="1300" dirty="0"/>
           </a:p>
@@ -38598,7 +40572,7 @@
                 <a:ea typeface="Trebuchet MS" pitchFamily="34" charset="-122"/>
                 <a:cs typeface="Trebuchet MS" pitchFamily="34" charset="-120"/>
               </a:rPr>
-              <a:t>firm</a:t>
+              <a:t>vert</a:t>
             </a:r>
             <a:endParaRPr lang="en-US" sz="1300" dirty="0"/>
           </a:p>
@@ -38751,7 +40725,7 @@
                 <a:ea typeface="Trebuchet MS" pitchFamily="34" charset="-122"/>
                 <a:cs typeface="Trebuchet MS" pitchFamily="34" charset="-120"/>
               </a:rPr>
-              <a:t>vert</a:t>
+              <a:t>firm</a:t>
             </a:r>
             <a:endParaRPr lang="en-US" sz="1300" dirty="0"/>
           </a:p>
@@ -38815,7 +40789,7 @@
                 <a:ea typeface="Trebuchet MS" pitchFamily="34" charset="-122"/>
                 <a:cs typeface="Trebuchet MS" pitchFamily="34" charset="-120"/>
               </a:rPr>
-              <a:t>-ly</a:t>
+              <a:t>-ment</a:t>
             </a:r>
             <a:endParaRPr lang="en-US" sz="1300" dirty="0"/>
           </a:p>
@@ -39726,7 +41700,7 @@
                 <a:ea typeface="Calibri" pitchFamily="34" charset="-122"/>
                 <a:cs typeface="Calibri" pitchFamily="34" charset="-120"/>
               </a:rPr>
-              <a:t>To think carefully about something before making a decision.</a:t>
+              <a:t>To focus all your attention on one thing.</a:t>
             </a:r>
             <a:endParaRPr lang="en-US" sz="1200" dirty="0"/>
           </a:p>
@@ -39865,7 +41839,7 @@
                 <a:ea typeface="Calibri" pitchFamily="34" charset="-122"/>
                 <a:cs typeface="Calibri" pitchFamily="34" charset="-120"/>
               </a:rPr>
-              <a:t>To say that something is definitely true or will definitely happen.</a:t>
+              <a:t>To say for certain that something is true or will happen.</a:t>
             </a:r>
             <a:endParaRPr lang="en-US" sz="1200" dirty="0"/>
           </a:p>
@@ -40004,7 +41978,7 @@
                 <a:ea typeface="Calibri" pitchFamily="34" charset="-122"/>
                 <a:cs typeface="Calibri" pitchFamily="34" charset="-120"/>
               </a:rPr>
-              <a:t>To finish something or decide something after thinking carefully.</a:t>
+              <a:t>To think carefully about something before making a decision.</a:t>
             </a:r>
             <a:endParaRPr lang="en-US" sz="1200" dirty="0"/>
           </a:p>
@@ -40282,7 +42256,7 @@
                 <a:ea typeface="Calibri" pitchFamily="34" charset="-122"/>
                 <a:cs typeface="Calibri" pitchFamily="34" charset="-120"/>
               </a:rPr>
-              <a:t>To join two or more things together so they work as one.</a:t>
+              <a:t>To join two or more things together so they work or go with each other.</a:t>
             </a:r>
             <a:endParaRPr lang="en-US" sz="1200" dirty="0"/>
           </a:p>
@@ -40355,7 +42329,7 @@
                 <a:ea typeface="Trebuchet MS" pitchFamily="34" charset="-122"/>
                 <a:cs typeface="Trebuchet MS" pitchFamily="34" charset="-120"/>
               </a:rPr>
-              <a:t>conclude</a:t>
+              <a:t>consider</a:t>
             </a:r>
             <a:endParaRPr lang="en-US" sz="1200" dirty="0"/>
           </a:p>
@@ -40421,7 +42395,7 @@
                 <a:ea typeface="Calibri" pitchFamily="34" charset="-122"/>
                 <a:cs typeface="Calibri" pitchFamily="34" charset="-120"/>
               </a:rPr>
-              <a:t>To hold something inside or keep it from spreading.</a:t>
+              <a:t>To hold something inside, like a box containing toys.</a:t>
             </a:r>
             <a:endParaRPr lang="en-US" sz="1200" dirty="0"/>
           </a:p>
@@ -40494,7 +42468,7 @@
                 <a:ea typeface="Trebuchet MS" pitchFamily="34" charset="-122"/>
                 <a:cs typeface="Trebuchet MS" pitchFamily="34" charset="-120"/>
               </a:rPr>
-              <a:t>consider</a:t>
+              <a:t>concentrate</a:t>
             </a:r>
             <a:endParaRPr lang="en-US" sz="1200" dirty="0"/>
           </a:p>
@@ -40560,7 +42534,7 @@
                 <a:ea typeface="Calibri" pitchFamily="34" charset="-122"/>
                 <a:cs typeface="Calibri" pitchFamily="34" charset="-120"/>
               </a:rPr>
-              <a:t>To build or put something together carefully, piece by piece.</a:t>
+              <a:t>To build or put something together, like a building or a model.</a:t>
             </a:r>
             <a:endParaRPr lang="en-US" sz="1200" dirty="0"/>
           </a:p>
@@ -41219,7 +43193,7 @@
                 <a:ea typeface="Calibri" pitchFamily="34" charset="-122"/>
                 <a:cs typeface="Calibri" pitchFamily="34" charset="-120"/>
               </a:rPr>
-              <a:t>Can you confirm that the excursion is on Friday?</a:t>
+              <a:t>Please concentrate on your work so you can finish before lunch.</a:t>
             </a:r>
             <a:endParaRPr lang="en-US" sz="1500" dirty="0"/>
           </a:p>
@@ -41383,7 +43357,7 @@
                 <a:ea typeface="Calibri" pitchFamily="34" charset="-122"/>
                 <a:cs typeface="Calibri" pitchFamily="34" charset="-120"/>
               </a:rPr>
-              <a:t>We need to connect the two pieces of wire carefully.</a:t>
+              <a:t>The teacher asked us to consider both sides of the argument before deciding.</a:t>
             </a:r>
             <a:endParaRPr lang="en-US" sz="1500" dirty="0"/>
           </a:p>
